--- a/Финал.pptx
+++ b/Финал.pptx
@@ -226,7 +226,7 @@
           <a:p>
             <a:fld id="{B7268E1E-0E44-426D-905E-8AD9B19D2182}" type="datetimeFigureOut">
               <a:rPr lang="cs-CZ" smtClean="0"/>
-              <a:t>10.03.2026</a:t>
+              <a:t>11.03.2026</a:t>
             </a:fld>
             <a:endParaRPr lang="cs-CZ"/>
           </a:p>
@@ -2418,7 +2418,7 @@
             <a:fld id="{1D8BD707-D9CF-40AE-B4C6-C98DA3205C09}" type="datetimeFigureOut">
               <a:rPr lang="en-US" smtClean="0"/>
               <a:pPr/>
-              <a:t>3/10/2026</a:t>
+              <a:t>3/11/2026</a:t>
             </a:fld>
             <a:endParaRPr lang="en-US"/>
           </a:p>
@@ -2583,7 +2583,7 @@
             <a:fld id="{1D8BD707-D9CF-40AE-B4C6-C98DA3205C09}" type="datetimeFigureOut">
               <a:rPr lang="en-US" smtClean="0"/>
               <a:pPr/>
-              <a:t>3/10/2026</a:t>
+              <a:t>3/11/2026</a:t>
             </a:fld>
             <a:endParaRPr lang="en-US"/>
           </a:p>
@@ -2758,7 +2758,7 @@
             <a:fld id="{1D8BD707-D9CF-40AE-B4C6-C98DA3205C09}" type="datetimeFigureOut">
               <a:rPr lang="en-US" smtClean="0"/>
               <a:pPr/>
-              <a:t>3/10/2026</a:t>
+              <a:t>3/11/2026</a:t>
             </a:fld>
             <a:endParaRPr lang="en-US"/>
           </a:p>
@@ -2923,7 +2923,7 @@
             <a:fld id="{1D8BD707-D9CF-40AE-B4C6-C98DA3205C09}" type="datetimeFigureOut">
               <a:rPr lang="en-US" smtClean="0"/>
               <a:pPr/>
-              <a:t>3/10/2026</a:t>
+              <a:t>3/11/2026</a:t>
             </a:fld>
             <a:endParaRPr lang="en-US"/>
           </a:p>
@@ -3165,7 +3165,7 @@
             <a:fld id="{1D8BD707-D9CF-40AE-B4C6-C98DA3205C09}" type="datetimeFigureOut">
               <a:rPr lang="en-US" smtClean="0"/>
               <a:pPr/>
-              <a:t>3/10/2026</a:t>
+              <a:t>3/11/2026</a:t>
             </a:fld>
             <a:endParaRPr lang="en-US"/>
           </a:p>
@@ -3447,7 +3447,7 @@
             <a:fld id="{1D8BD707-D9CF-40AE-B4C6-C98DA3205C09}" type="datetimeFigureOut">
               <a:rPr lang="en-US" smtClean="0"/>
               <a:pPr/>
-              <a:t>3/10/2026</a:t>
+              <a:t>3/11/2026</a:t>
             </a:fld>
             <a:endParaRPr lang="en-US"/>
           </a:p>
@@ -3863,7 +3863,7 @@
             <a:fld id="{1D8BD707-D9CF-40AE-B4C6-C98DA3205C09}" type="datetimeFigureOut">
               <a:rPr lang="en-US" smtClean="0"/>
               <a:pPr/>
-              <a:t>3/10/2026</a:t>
+              <a:t>3/11/2026</a:t>
             </a:fld>
             <a:endParaRPr lang="en-US"/>
           </a:p>
@@ -3977,7 +3977,7 @@
             <a:fld id="{1D8BD707-D9CF-40AE-B4C6-C98DA3205C09}" type="datetimeFigureOut">
               <a:rPr lang="en-US" smtClean="0"/>
               <a:pPr/>
-              <a:t>3/10/2026</a:t>
+              <a:t>3/11/2026</a:t>
             </a:fld>
             <a:endParaRPr lang="en-US"/>
           </a:p>
@@ -4069,7 +4069,7 @@
             <a:fld id="{1D8BD707-D9CF-40AE-B4C6-C98DA3205C09}" type="datetimeFigureOut">
               <a:rPr lang="en-US" smtClean="0"/>
               <a:pPr/>
-              <a:t>3/10/2026</a:t>
+              <a:t>3/11/2026</a:t>
             </a:fld>
             <a:endParaRPr lang="en-US"/>
           </a:p>
@@ -4341,7 +4341,7 @@
             <a:fld id="{1D8BD707-D9CF-40AE-B4C6-C98DA3205C09}" type="datetimeFigureOut">
               <a:rPr lang="en-US" smtClean="0"/>
               <a:pPr/>
-              <a:t>3/10/2026</a:t>
+              <a:t>3/11/2026</a:t>
             </a:fld>
             <a:endParaRPr lang="en-US"/>
           </a:p>
@@ -4590,7 +4590,7 @@
             <a:fld id="{1D8BD707-D9CF-40AE-B4C6-C98DA3205C09}" type="datetimeFigureOut">
               <a:rPr lang="en-US" smtClean="0"/>
               <a:pPr/>
-              <a:t>3/10/2026</a:t>
+              <a:t>3/11/2026</a:t>
             </a:fld>
             <a:endParaRPr lang="en-US"/>
           </a:p>
@@ -4798,7 +4798,7 @@
             <a:fld id="{1D8BD707-D9CF-40AE-B4C6-C98DA3205C09}" type="datetimeFigureOut">
               <a:rPr lang="en-US" smtClean="0"/>
               <a:pPr/>
-              <a:t>3/10/2026</a:t>
+              <a:t>3/11/2026</a:t>
             </a:fld>
             <a:endParaRPr lang="en-US"/>
           </a:p>
@@ -6084,7 +6084,7 @@
         </p:nvSpPr>
         <p:spPr>
           <a:xfrm>
-            <a:off x="992238" y="1765402"/>
+            <a:off x="6004612" y="1941566"/>
             <a:ext cx="5990187" cy="531364"/>
           </a:xfrm>
           <a:prstGeom prst="rect">
@@ -6103,7 +6103,7 @@
               </a:lnSpc>
             </a:pPr>
             <a:r>
-              <a:rPr lang="en-US" sz="3600">
+              <a:rPr lang="en-US" sz="3600" dirty="0" err="1">
                 <a:solidFill>
                   <a:srgbClr val="091C53"/>
                 </a:solidFill>
@@ -6112,8 +6112,41 @@
                 <a:cs typeface="Times New Roman"/>
                 <a:sym typeface="Times New Roman"/>
               </a:rPr>
-              <a:t>Алгоритмы классификации</a:t>
-            </a:r>
+              <a:t>Алгоритмы</a:t>
+            </a:r>
+            <a:r>
+              <a:rPr lang="en-US" sz="3600" dirty="0">
+                <a:solidFill>
+                  <a:srgbClr val="091C53"/>
+                </a:solidFill>
+                <a:latin typeface="Times New Roman"/>
+                <a:ea typeface="Times New Roman"/>
+                <a:cs typeface="Times New Roman"/>
+                <a:sym typeface="Times New Roman"/>
+              </a:rPr>
+              <a:t> </a:t>
+            </a:r>
+            <a:r>
+              <a:rPr lang="en-US" sz="3600" dirty="0" err="1">
+                <a:solidFill>
+                  <a:srgbClr val="091C53"/>
+                </a:solidFill>
+                <a:latin typeface="Times New Roman"/>
+                <a:ea typeface="Times New Roman"/>
+                <a:cs typeface="Times New Roman"/>
+                <a:sym typeface="Times New Roman"/>
+              </a:rPr>
+              <a:t>классификации</a:t>
+            </a:r>
+            <a:endParaRPr lang="en-US" sz="3600" dirty="0">
+              <a:solidFill>
+                <a:srgbClr val="091C53"/>
+              </a:solidFill>
+              <a:latin typeface="Times New Roman"/>
+              <a:ea typeface="Times New Roman"/>
+              <a:cs typeface="Times New Roman"/>
+              <a:sym typeface="Times New Roman"/>
+            </a:endParaRPr>
           </a:p>
         </p:txBody>
       </p:sp>

--- a/Финал.pptx
+++ b/Финал.pptx
@@ -5,7 +5,7 @@
     <p:sldMasterId id="2147483648" r:id="rId1"/>
   </p:sldMasterIdLst>
   <p:notesMasterIdLst>
-    <p:notesMasterId r:id="rId15"/>
+    <p:notesMasterId r:id="rId21"/>
   </p:notesMasterIdLst>
   <p:sldIdLst>
     <p:sldId id="256" r:id="rId2"/>
@@ -21,13 +21,19 @@
     <p:sldId id="268" r:id="rId12"/>
     <p:sldId id="269" r:id="rId13"/>
     <p:sldId id="265" r:id="rId14"/>
+    <p:sldId id="280" r:id="rId15"/>
+    <p:sldId id="278" r:id="rId16"/>
+    <p:sldId id="279" r:id="rId17"/>
+    <p:sldId id="275" r:id="rId18"/>
+    <p:sldId id="277" r:id="rId19"/>
+    <p:sldId id="276" r:id="rId20"/>
   </p:sldIdLst>
   <p:sldSz cx="18288000" cy="10287000"/>
   <p:notesSz cx="6858000" cy="9144000"/>
   <p:embeddedFontLst>
     <p:embeddedFont>
       <p:font typeface="Times New Roman Italics" panose="020B0604020202020204" charset="0"/>
-      <p:regular r:id="rId16"/>
+      <p:regular r:id="rId22"/>
     </p:embeddedFont>
   </p:embeddedFontLst>
   <p:defaultTextStyle>
@@ -226,7 +232,7 @@
           <a:p>
             <a:fld id="{B7268E1E-0E44-426D-905E-8AD9B19D2182}" type="datetimeFigureOut">
               <a:rPr lang="cs-CZ" smtClean="0"/>
-              <a:t>11.03.2026</a:t>
+              <a:t>01.04.2026</a:t>
             </a:fld>
             <a:endParaRPr lang="cs-CZ"/>
           </a:p>
@@ -712,6 +718,536 @@
 </p:notes>
 </file>
 
+<file path=ppt/notesSlides/notesSlide10.xml><?xml version="1.0" encoding="utf-8"?>
+<p:notes xmlns:a="http://schemas.openxmlformats.org/drawingml/2006/main" xmlns:r="http://schemas.openxmlformats.org/officeDocument/2006/relationships" xmlns:p="http://schemas.openxmlformats.org/presentationml/2006/main">
+  <p:cSld>
+    <p:spTree>
+      <p:nvGrpSpPr>
+        <p:cNvPr id="1" name="">
+          <a:extLst>
+            <a:ext uri="{FF2B5EF4-FFF2-40B4-BE49-F238E27FC236}">
+              <a16:creationId xmlns:a16="http://schemas.microsoft.com/office/drawing/2014/main" id="{EED1B43F-1E89-977E-4B96-8F835E4CC264}"/>
+            </a:ext>
+          </a:extLst>
+        </p:cNvPr>
+        <p:cNvGrpSpPr/>
+        <p:nvPr/>
+      </p:nvGrpSpPr>
+      <p:grpSpPr>
+        <a:xfrm>
+          <a:off x="0" y="0"/>
+          <a:ext cx="0" cy="0"/>
+          <a:chOff x="0" y="0"/>
+          <a:chExt cx="0" cy="0"/>
+        </a:xfrm>
+      </p:grpSpPr>
+      <p:sp>
+        <p:nvSpPr>
+          <p:cNvPr id="2" name="Header Placeholder 1">
+            <a:extLst>
+              <a:ext uri="{FF2B5EF4-FFF2-40B4-BE49-F238E27FC236}">
+                <a16:creationId xmlns:a16="http://schemas.microsoft.com/office/drawing/2014/main" id="{8071D306-AEEC-9016-E9CA-14E6838DE490}"/>
+              </a:ext>
+            </a:extLst>
+          </p:cNvPr>
+          <p:cNvSpPr>
+            <a:spLocks noGrp="1"/>
+          </p:cNvSpPr>
+          <p:nvPr>
+            <p:ph type="hdr" sz="quarter"/>
+          </p:nvPr>
+        </p:nvSpPr>
+        <p:spPr>
+          <a:xfrm>
+            <a:off x="0" y="0"/>
+            <a:ext cx="3962400" cy="342900"/>
+          </a:xfrm>
+          <a:prstGeom prst="rect">
+            <a:avLst/>
+          </a:prstGeom>
+        </p:spPr>
+        <p:txBody>
+          <a:bodyPr vert="horz" lIns="91440" tIns="45720" rIns="91440" bIns="45720" rtlCol="0"/>
+          <a:lstStyle>
+            <a:lvl1pPr algn="l">
+              <a:defRPr sz="1200"/>
+            </a:lvl1pPr>
+          </a:lstStyle>
+          <a:p>
+            <a:endParaRPr/>
+          </a:p>
+        </p:txBody>
+      </p:sp>
+      <p:sp>
+        <p:nvSpPr>
+          <p:cNvPr id="3" name="Date Placeholder 2">
+            <a:extLst>
+              <a:ext uri="{FF2B5EF4-FFF2-40B4-BE49-F238E27FC236}">
+                <a16:creationId xmlns:a16="http://schemas.microsoft.com/office/drawing/2014/main" id="{9772FE7D-91A1-FFFB-603A-FCE2DA61AA4D}"/>
+              </a:ext>
+            </a:extLst>
+          </p:cNvPr>
+          <p:cNvSpPr>
+            <a:spLocks noGrp="1"/>
+          </p:cNvSpPr>
+          <p:nvPr>
+            <p:ph type="dt" idx="1"/>
+          </p:nvPr>
+        </p:nvSpPr>
+        <p:spPr>
+          <a:xfrm>
+            <a:off x="5180013" y="0"/>
+            <a:ext cx="3962400" cy="342900"/>
+          </a:xfrm>
+          <a:prstGeom prst="rect">
+            <a:avLst/>
+          </a:prstGeom>
+        </p:spPr>
+        <p:txBody>
+          <a:bodyPr vert="horz" lIns="91440" tIns="45720" rIns="91440" bIns="45720" rtlCol="0"/>
+          <a:lstStyle>
+            <a:lvl1pPr algn="r">
+              <a:defRPr sz="1200"/>
+            </a:lvl1pPr>
+          </a:lstStyle>
+          <a:p>
+            <a:r>
+              <a:rPr lang="cs-CZ"/>
+              <a:t>1.7.2013</a:t>
+            </a:r>
+          </a:p>
+        </p:txBody>
+      </p:sp>
+      <p:sp>
+        <p:nvSpPr>
+          <p:cNvPr id="4" name="Slide Image Placeholder 3">
+            <a:extLst>
+              <a:ext uri="{FF2B5EF4-FFF2-40B4-BE49-F238E27FC236}">
+                <a16:creationId xmlns:a16="http://schemas.microsoft.com/office/drawing/2014/main" id="{7286B98E-7C71-4521-566B-00A966073F79}"/>
+              </a:ext>
+            </a:extLst>
+          </p:cNvPr>
+          <p:cNvSpPr>
+            <a:spLocks noGrp="1" noRot="1" noChangeAspect="1"/>
+          </p:cNvSpPr>
+          <p:nvPr>
+            <p:ph type="sldImg" idx="2"/>
+          </p:nvPr>
+        </p:nvSpPr>
+        <p:spPr>
+          <a:xfrm>
+            <a:off x="2290763" y="512763"/>
+            <a:ext cx="4562475" cy="2566987"/>
+          </a:xfrm>
+          <a:prstGeom prst="rect">
+            <a:avLst/>
+          </a:prstGeom>
+          <a:noFill/>
+          <a:ln w="12700">
+            <a:solidFill>
+              <a:prstClr val="black"/>
+            </a:solidFill>
+          </a:ln>
+        </p:spPr>
+        <p:txBody>
+          <a:bodyPr vert="horz" lIns="91440" tIns="45720" rIns="91440" bIns="45720" rtlCol="0" anchor="ctr"/>
+          <a:lstStyle/>
+          <a:p>
+            <a:endParaRPr/>
+          </a:p>
+        </p:txBody>
+      </p:sp>
+      <p:sp>
+        <p:nvSpPr>
+          <p:cNvPr id="5" name="Notes Placeholder 4">
+            <a:extLst>
+              <a:ext uri="{FF2B5EF4-FFF2-40B4-BE49-F238E27FC236}">
+                <a16:creationId xmlns:a16="http://schemas.microsoft.com/office/drawing/2014/main" id="{7325EC29-F3E9-E01C-11C8-04817D6E477D}"/>
+              </a:ext>
+            </a:extLst>
+          </p:cNvPr>
+          <p:cNvSpPr>
+            <a:spLocks noGrp="1"/>
+          </p:cNvSpPr>
+          <p:nvPr>
+            <p:ph type="body" sz="quarter" idx="3"/>
+          </p:nvPr>
+        </p:nvSpPr>
+        <p:spPr>
+          <a:xfrm>
+            <a:off x="914400" y="3251200"/>
+            <a:ext cx="7315200" cy="3081338"/>
+          </a:xfrm>
+          <a:prstGeom prst="rect">
+            <a:avLst/>
+          </a:prstGeom>
+        </p:spPr>
+        <p:txBody>
+          <a:bodyPr vert="horz" lIns="91440" tIns="45720" rIns="91440" bIns="45720" rtlCol="0"/>
+          <a:lstStyle/>
+          <a:p>
+            <a:r>
+              <a:rPr lang="en-US"/>
+              <a:t>10</a:t>
+            </a:r>
+          </a:p>
+        </p:txBody>
+      </p:sp>
+      <p:sp>
+        <p:nvSpPr>
+          <p:cNvPr id="6" name="Footer Placeholder 5">
+            <a:extLst>
+              <a:ext uri="{FF2B5EF4-FFF2-40B4-BE49-F238E27FC236}">
+                <a16:creationId xmlns:a16="http://schemas.microsoft.com/office/drawing/2014/main" id="{1172499F-3497-8657-3445-59F243922559}"/>
+              </a:ext>
+            </a:extLst>
+          </p:cNvPr>
+          <p:cNvSpPr>
+            <a:spLocks noGrp="1"/>
+          </p:cNvSpPr>
+          <p:nvPr>
+            <p:ph type="ftr" sz="quarter" idx="4"/>
+          </p:nvPr>
+        </p:nvSpPr>
+        <p:spPr>
+          <a:xfrm>
+            <a:off x="0" y="6502400"/>
+            <a:ext cx="3962400" cy="341313"/>
+          </a:xfrm>
+          <a:prstGeom prst="rect">
+            <a:avLst/>
+          </a:prstGeom>
+        </p:spPr>
+        <p:txBody>
+          <a:bodyPr vert="horz" lIns="91440" tIns="45720" rIns="91440" bIns="45720" rtlCol="0" anchor="b"/>
+          <a:lstStyle>
+            <a:lvl1pPr algn="l">
+              <a:defRPr sz="1200"/>
+            </a:lvl1pPr>
+          </a:lstStyle>
+          <a:p>
+            <a:endParaRPr/>
+          </a:p>
+        </p:txBody>
+      </p:sp>
+      <p:sp>
+        <p:nvSpPr>
+          <p:cNvPr id="7" name="Slide Number Placeholder 6">
+            <a:extLst>
+              <a:ext uri="{FF2B5EF4-FFF2-40B4-BE49-F238E27FC236}">
+                <a16:creationId xmlns:a16="http://schemas.microsoft.com/office/drawing/2014/main" id="{44284F18-DE09-A586-3FB4-0B0E68802893}"/>
+              </a:ext>
+            </a:extLst>
+          </p:cNvPr>
+          <p:cNvSpPr>
+            <a:spLocks noGrp="1"/>
+          </p:cNvSpPr>
+          <p:nvPr>
+            <p:ph type="sldNum" sz="quarter" idx="5"/>
+          </p:nvPr>
+        </p:nvSpPr>
+        <p:spPr>
+          <a:xfrm>
+            <a:off x="5180013" y="6502400"/>
+            <a:ext cx="3962400" cy="341313"/>
+          </a:xfrm>
+          <a:prstGeom prst="rect">
+            <a:avLst/>
+          </a:prstGeom>
+        </p:spPr>
+        <p:txBody>
+          <a:bodyPr vert="horz" lIns="91440" tIns="45720" rIns="91440" bIns="45720" rtlCol="0" anchor="b"/>
+          <a:lstStyle>
+            <a:lvl1pPr algn="r">
+              <a:defRPr sz="1200"/>
+            </a:lvl1pPr>
+          </a:lstStyle>
+          <a:p>
+            <a:r>
+              <a:rPr lang="cs-CZ"/>
+              <a:t>‹#›</a:t>
+            </a:r>
+          </a:p>
+        </p:txBody>
+      </p:sp>
+    </p:spTree>
+    <p:extLst>
+      <p:ext uri="{BB962C8B-B14F-4D97-AF65-F5344CB8AC3E}">
+        <p14:creationId xmlns:p14="http://schemas.microsoft.com/office/powerpoint/2010/main" val="2407241119"/>
+      </p:ext>
+    </p:extLst>
+  </p:cSld>
+  <p:clrMapOvr>
+    <a:masterClrMapping/>
+  </p:clrMapOvr>
+</p:notes>
+</file>
+
+<file path=ppt/notesSlides/notesSlide11.xml><?xml version="1.0" encoding="utf-8"?>
+<p:notes xmlns:a="http://schemas.openxmlformats.org/drawingml/2006/main" xmlns:r="http://schemas.openxmlformats.org/officeDocument/2006/relationships" xmlns:p="http://schemas.openxmlformats.org/presentationml/2006/main">
+  <p:cSld>
+    <p:spTree>
+      <p:nvGrpSpPr>
+        <p:cNvPr id="1" name="">
+          <a:extLst>
+            <a:ext uri="{FF2B5EF4-FFF2-40B4-BE49-F238E27FC236}">
+              <a16:creationId xmlns:a16="http://schemas.microsoft.com/office/drawing/2014/main" id="{7C578F55-24A6-7AFA-3FE1-91EEE0D81092}"/>
+            </a:ext>
+          </a:extLst>
+        </p:cNvPr>
+        <p:cNvGrpSpPr/>
+        <p:nvPr/>
+      </p:nvGrpSpPr>
+      <p:grpSpPr>
+        <a:xfrm>
+          <a:off x="0" y="0"/>
+          <a:ext cx="0" cy="0"/>
+          <a:chOff x="0" y="0"/>
+          <a:chExt cx="0" cy="0"/>
+        </a:xfrm>
+      </p:grpSpPr>
+      <p:sp>
+        <p:nvSpPr>
+          <p:cNvPr id="2" name="Header Placeholder 1">
+            <a:extLst>
+              <a:ext uri="{FF2B5EF4-FFF2-40B4-BE49-F238E27FC236}">
+                <a16:creationId xmlns:a16="http://schemas.microsoft.com/office/drawing/2014/main" id="{1D63FF26-6C7B-70E9-6590-41BE0CF7FD69}"/>
+              </a:ext>
+            </a:extLst>
+          </p:cNvPr>
+          <p:cNvSpPr>
+            <a:spLocks noGrp="1"/>
+          </p:cNvSpPr>
+          <p:nvPr>
+            <p:ph type="hdr" sz="quarter"/>
+          </p:nvPr>
+        </p:nvSpPr>
+        <p:spPr>
+          <a:xfrm>
+            <a:off x="0" y="0"/>
+            <a:ext cx="3962400" cy="342900"/>
+          </a:xfrm>
+          <a:prstGeom prst="rect">
+            <a:avLst/>
+          </a:prstGeom>
+        </p:spPr>
+        <p:txBody>
+          <a:bodyPr vert="horz" lIns="91440" tIns="45720" rIns="91440" bIns="45720" rtlCol="0"/>
+          <a:lstStyle>
+            <a:lvl1pPr algn="l">
+              <a:defRPr sz="1200"/>
+            </a:lvl1pPr>
+          </a:lstStyle>
+          <a:p>
+            <a:endParaRPr/>
+          </a:p>
+        </p:txBody>
+      </p:sp>
+      <p:sp>
+        <p:nvSpPr>
+          <p:cNvPr id="3" name="Date Placeholder 2">
+            <a:extLst>
+              <a:ext uri="{FF2B5EF4-FFF2-40B4-BE49-F238E27FC236}">
+                <a16:creationId xmlns:a16="http://schemas.microsoft.com/office/drawing/2014/main" id="{B67E2BCD-BE69-6D2A-6A0E-5118B24AE520}"/>
+              </a:ext>
+            </a:extLst>
+          </p:cNvPr>
+          <p:cNvSpPr>
+            <a:spLocks noGrp="1"/>
+          </p:cNvSpPr>
+          <p:nvPr>
+            <p:ph type="dt" idx="1"/>
+          </p:nvPr>
+        </p:nvSpPr>
+        <p:spPr>
+          <a:xfrm>
+            <a:off x="5180013" y="0"/>
+            <a:ext cx="3962400" cy="342900"/>
+          </a:xfrm>
+          <a:prstGeom prst="rect">
+            <a:avLst/>
+          </a:prstGeom>
+        </p:spPr>
+        <p:txBody>
+          <a:bodyPr vert="horz" lIns="91440" tIns="45720" rIns="91440" bIns="45720" rtlCol="0"/>
+          <a:lstStyle>
+            <a:lvl1pPr algn="r">
+              <a:defRPr sz="1200"/>
+            </a:lvl1pPr>
+          </a:lstStyle>
+          <a:p>
+            <a:r>
+              <a:rPr lang="cs-CZ"/>
+              <a:t>1.7.2013</a:t>
+            </a:r>
+          </a:p>
+        </p:txBody>
+      </p:sp>
+      <p:sp>
+        <p:nvSpPr>
+          <p:cNvPr id="4" name="Slide Image Placeholder 3">
+            <a:extLst>
+              <a:ext uri="{FF2B5EF4-FFF2-40B4-BE49-F238E27FC236}">
+                <a16:creationId xmlns:a16="http://schemas.microsoft.com/office/drawing/2014/main" id="{62A8EA4B-9774-8907-ABFF-B656B977501E}"/>
+              </a:ext>
+            </a:extLst>
+          </p:cNvPr>
+          <p:cNvSpPr>
+            <a:spLocks noGrp="1" noRot="1" noChangeAspect="1"/>
+          </p:cNvSpPr>
+          <p:nvPr>
+            <p:ph type="sldImg" idx="2"/>
+          </p:nvPr>
+        </p:nvSpPr>
+        <p:spPr>
+          <a:xfrm>
+            <a:off x="2290763" y="512763"/>
+            <a:ext cx="4562475" cy="2566987"/>
+          </a:xfrm>
+          <a:prstGeom prst="rect">
+            <a:avLst/>
+          </a:prstGeom>
+          <a:noFill/>
+          <a:ln w="12700">
+            <a:solidFill>
+              <a:prstClr val="black"/>
+            </a:solidFill>
+          </a:ln>
+        </p:spPr>
+        <p:txBody>
+          <a:bodyPr vert="horz" lIns="91440" tIns="45720" rIns="91440" bIns="45720" rtlCol="0" anchor="ctr"/>
+          <a:lstStyle/>
+          <a:p>
+            <a:endParaRPr/>
+          </a:p>
+        </p:txBody>
+      </p:sp>
+      <p:sp>
+        <p:nvSpPr>
+          <p:cNvPr id="5" name="Notes Placeholder 4">
+            <a:extLst>
+              <a:ext uri="{FF2B5EF4-FFF2-40B4-BE49-F238E27FC236}">
+                <a16:creationId xmlns:a16="http://schemas.microsoft.com/office/drawing/2014/main" id="{24461E7A-91C5-309D-762E-2986979B1524}"/>
+              </a:ext>
+            </a:extLst>
+          </p:cNvPr>
+          <p:cNvSpPr>
+            <a:spLocks noGrp="1"/>
+          </p:cNvSpPr>
+          <p:nvPr>
+            <p:ph type="body" sz="quarter" idx="3"/>
+          </p:nvPr>
+        </p:nvSpPr>
+        <p:spPr>
+          <a:xfrm>
+            <a:off x="914400" y="3251200"/>
+            <a:ext cx="7315200" cy="3081338"/>
+          </a:xfrm>
+          <a:prstGeom prst="rect">
+            <a:avLst/>
+          </a:prstGeom>
+        </p:spPr>
+        <p:txBody>
+          <a:bodyPr vert="horz" lIns="91440" tIns="45720" rIns="91440" bIns="45720" rtlCol="0"/>
+          <a:lstStyle/>
+          <a:p>
+            <a:r>
+              <a:rPr lang="en-US"/>
+              <a:t>10</a:t>
+            </a:r>
+          </a:p>
+        </p:txBody>
+      </p:sp>
+      <p:sp>
+        <p:nvSpPr>
+          <p:cNvPr id="6" name="Footer Placeholder 5">
+            <a:extLst>
+              <a:ext uri="{FF2B5EF4-FFF2-40B4-BE49-F238E27FC236}">
+                <a16:creationId xmlns:a16="http://schemas.microsoft.com/office/drawing/2014/main" id="{E6765989-EC9F-286A-7043-A5A34A2AB69E}"/>
+              </a:ext>
+            </a:extLst>
+          </p:cNvPr>
+          <p:cNvSpPr>
+            <a:spLocks noGrp="1"/>
+          </p:cNvSpPr>
+          <p:nvPr>
+            <p:ph type="ftr" sz="quarter" idx="4"/>
+          </p:nvPr>
+        </p:nvSpPr>
+        <p:spPr>
+          <a:xfrm>
+            <a:off x="0" y="6502400"/>
+            <a:ext cx="3962400" cy="341313"/>
+          </a:xfrm>
+          <a:prstGeom prst="rect">
+            <a:avLst/>
+          </a:prstGeom>
+        </p:spPr>
+        <p:txBody>
+          <a:bodyPr vert="horz" lIns="91440" tIns="45720" rIns="91440" bIns="45720" rtlCol="0" anchor="b"/>
+          <a:lstStyle>
+            <a:lvl1pPr algn="l">
+              <a:defRPr sz="1200"/>
+            </a:lvl1pPr>
+          </a:lstStyle>
+          <a:p>
+            <a:endParaRPr/>
+          </a:p>
+        </p:txBody>
+      </p:sp>
+      <p:sp>
+        <p:nvSpPr>
+          <p:cNvPr id="7" name="Slide Number Placeholder 6">
+            <a:extLst>
+              <a:ext uri="{FF2B5EF4-FFF2-40B4-BE49-F238E27FC236}">
+                <a16:creationId xmlns:a16="http://schemas.microsoft.com/office/drawing/2014/main" id="{E3ED4019-FB3A-FD97-1515-9CD98FFEDC08}"/>
+              </a:ext>
+            </a:extLst>
+          </p:cNvPr>
+          <p:cNvSpPr>
+            <a:spLocks noGrp="1"/>
+          </p:cNvSpPr>
+          <p:nvPr>
+            <p:ph type="sldNum" sz="quarter" idx="5"/>
+          </p:nvPr>
+        </p:nvSpPr>
+        <p:spPr>
+          <a:xfrm>
+            <a:off x="5180013" y="6502400"/>
+            <a:ext cx="3962400" cy="341313"/>
+          </a:xfrm>
+          <a:prstGeom prst="rect">
+            <a:avLst/>
+          </a:prstGeom>
+        </p:spPr>
+        <p:txBody>
+          <a:bodyPr vert="horz" lIns="91440" tIns="45720" rIns="91440" bIns="45720" rtlCol="0" anchor="b"/>
+          <a:lstStyle>
+            <a:lvl1pPr algn="r">
+              <a:defRPr sz="1200"/>
+            </a:lvl1pPr>
+          </a:lstStyle>
+          <a:p>
+            <a:r>
+              <a:rPr lang="cs-CZ"/>
+              <a:t>‹#›</a:t>
+            </a:r>
+          </a:p>
+        </p:txBody>
+      </p:sp>
+    </p:spTree>
+    <p:extLst>
+      <p:ext uri="{BB962C8B-B14F-4D97-AF65-F5344CB8AC3E}">
+        <p14:creationId xmlns:p14="http://schemas.microsoft.com/office/powerpoint/2010/main" val="863859633"/>
+      </p:ext>
+    </p:extLst>
+  </p:cSld>
+  <p:clrMapOvr>
+    <a:masterClrMapping/>
+  </p:clrMapOvr>
+</p:notes>
+</file>
+
 <file path=ppt/notesSlides/notesSlide2.xml><?xml version="1.0" encoding="utf-8"?>
 <p:notes xmlns:a="http://schemas.openxmlformats.org/drawingml/2006/main" xmlns:r="http://schemas.openxmlformats.org/officeDocument/2006/relationships" xmlns:p="http://schemas.openxmlformats.org/presentationml/2006/main">
   <p:cSld>
@@ -2238,6 +2774,271 @@
 </p:notes>
 </file>
 
+<file path=ppt/notesSlides/notesSlide9.xml><?xml version="1.0" encoding="utf-8"?>
+<p:notes xmlns:a="http://schemas.openxmlformats.org/drawingml/2006/main" xmlns:r="http://schemas.openxmlformats.org/officeDocument/2006/relationships" xmlns:p="http://schemas.openxmlformats.org/presentationml/2006/main">
+  <p:cSld>
+    <p:spTree>
+      <p:nvGrpSpPr>
+        <p:cNvPr id="1" name="">
+          <a:extLst>
+            <a:ext uri="{FF2B5EF4-FFF2-40B4-BE49-F238E27FC236}">
+              <a16:creationId xmlns:a16="http://schemas.microsoft.com/office/drawing/2014/main" id="{1C5E1F70-B751-75D8-CDCE-ADB89C55D6CC}"/>
+            </a:ext>
+          </a:extLst>
+        </p:cNvPr>
+        <p:cNvGrpSpPr/>
+        <p:nvPr/>
+      </p:nvGrpSpPr>
+      <p:grpSpPr>
+        <a:xfrm>
+          <a:off x="0" y="0"/>
+          <a:ext cx="0" cy="0"/>
+          <a:chOff x="0" y="0"/>
+          <a:chExt cx="0" cy="0"/>
+        </a:xfrm>
+      </p:grpSpPr>
+      <p:sp>
+        <p:nvSpPr>
+          <p:cNvPr id="2" name="Header Placeholder 1">
+            <a:extLst>
+              <a:ext uri="{FF2B5EF4-FFF2-40B4-BE49-F238E27FC236}">
+                <a16:creationId xmlns:a16="http://schemas.microsoft.com/office/drawing/2014/main" id="{64B93329-AE0E-7FF1-61A5-50EDEE9014C9}"/>
+              </a:ext>
+            </a:extLst>
+          </p:cNvPr>
+          <p:cNvSpPr>
+            <a:spLocks noGrp="1"/>
+          </p:cNvSpPr>
+          <p:nvPr>
+            <p:ph type="hdr" sz="quarter"/>
+          </p:nvPr>
+        </p:nvSpPr>
+        <p:spPr>
+          <a:xfrm>
+            <a:off x="0" y="0"/>
+            <a:ext cx="3962400" cy="342900"/>
+          </a:xfrm>
+          <a:prstGeom prst="rect">
+            <a:avLst/>
+          </a:prstGeom>
+        </p:spPr>
+        <p:txBody>
+          <a:bodyPr vert="horz" lIns="91440" tIns="45720" rIns="91440" bIns="45720" rtlCol="0"/>
+          <a:lstStyle>
+            <a:lvl1pPr algn="l">
+              <a:defRPr sz="1200"/>
+            </a:lvl1pPr>
+          </a:lstStyle>
+          <a:p>
+            <a:endParaRPr/>
+          </a:p>
+        </p:txBody>
+      </p:sp>
+      <p:sp>
+        <p:nvSpPr>
+          <p:cNvPr id="3" name="Date Placeholder 2">
+            <a:extLst>
+              <a:ext uri="{FF2B5EF4-FFF2-40B4-BE49-F238E27FC236}">
+                <a16:creationId xmlns:a16="http://schemas.microsoft.com/office/drawing/2014/main" id="{C916C924-1507-5670-7F1B-1DBB9BA6B979}"/>
+              </a:ext>
+            </a:extLst>
+          </p:cNvPr>
+          <p:cNvSpPr>
+            <a:spLocks noGrp="1"/>
+          </p:cNvSpPr>
+          <p:nvPr>
+            <p:ph type="dt" idx="1"/>
+          </p:nvPr>
+        </p:nvSpPr>
+        <p:spPr>
+          <a:xfrm>
+            <a:off x="5180013" y="0"/>
+            <a:ext cx="3962400" cy="342900"/>
+          </a:xfrm>
+          <a:prstGeom prst="rect">
+            <a:avLst/>
+          </a:prstGeom>
+        </p:spPr>
+        <p:txBody>
+          <a:bodyPr vert="horz" lIns="91440" tIns="45720" rIns="91440" bIns="45720" rtlCol="0"/>
+          <a:lstStyle>
+            <a:lvl1pPr algn="r">
+              <a:defRPr sz="1200"/>
+            </a:lvl1pPr>
+          </a:lstStyle>
+          <a:p>
+            <a:r>
+              <a:rPr lang="cs-CZ"/>
+              <a:t>1.7.2013</a:t>
+            </a:r>
+          </a:p>
+        </p:txBody>
+      </p:sp>
+      <p:sp>
+        <p:nvSpPr>
+          <p:cNvPr id="4" name="Slide Image Placeholder 3">
+            <a:extLst>
+              <a:ext uri="{FF2B5EF4-FFF2-40B4-BE49-F238E27FC236}">
+                <a16:creationId xmlns:a16="http://schemas.microsoft.com/office/drawing/2014/main" id="{FE0F30C4-ECB7-7B3F-9D2D-22AE5BA30647}"/>
+              </a:ext>
+            </a:extLst>
+          </p:cNvPr>
+          <p:cNvSpPr>
+            <a:spLocks noGrp="1" noRot="1" noChangeAspect="1"/>
+          </p:cNvSpPr>
+          <p:nvPr>
+            <p:ph type="sldImg" idx="2"/>
+          </p:nvPr>
+        </p:nvSpPr>
+        <p:spPr>
+          <a:xfrm>
+            <a:off x="2290763" y="512763"/>
+            <a:ext cx="4562475" cy="2566987"/>
+          </a:xfrm>
+          <a:prstGeom prst="rect">
+            <a:avLst/>
+          </a:prstGeom>
+          <a:noFill/>
+          <a:ln w="12700">
+            <a:solidFill>
+              <a:prstClr val="black"/>
+            </a:solidFill>
+          </a:ln>
+        </p:spPr>
+        <p:txBody>
+          <a:bodyPr vert="horz" lIns="91440" tIns="45720" rIns="91440" bIns="45720" rtlCol="0" anchor="ctr"/>
+          <a:lstStyle/>
+          <a:p>
+            <a:endParaRPr/>
+          </a:p>
+        </p:txBody>
+      </p:sp>
+      <p:sp>
+        <p:nvSpPr>
+          <p:cNvPr id="5" name="Notes Placeholder 4">
+            <a:extLst>
+              <a:ext uri="{FF2B5EF4-FFF2-40B4-BE49-F238E27FC236}">
+                <a16:creationId xmlns:a16="http://schemas.microsoft.com/office/drawing/2014/main" id="{1C1291DD-D015-48FA-8BC9-D61695097F82}"/>
+              </a:ext>
+            </a:extLst>
+          </p:cNvPr>
+          <p:cNvSpPr>
+            <a:spLocks noGrp="1"/>
+          </p:cNvSpPr>
+          <p:nvPr>
+            <p:ph type="body" sz="quarter" idx="3"/>
+          </p:nvPr>
+        </p:nvSpPr>
+        <p:spPr>
+          <a:xfrm>
+            <a:off x="914400" y="3251200"/>
+            <a:ext cx="7315200" cy="3081338"/>
+          </a:xfrm>
+          <a:prstGeom prst="rect">
+            <a:avLst/>
+          </a:prstGeom>
+        </p:spPr>
+        <p:txBody>
+          <a:bodyPr vert="horz" lIns="91440" tIns="45720" rIns="91440" bIns="45720" rtlCol="0"/>
+          <a:lstStyle/>
+          <a:p>
+            <a:r>
+              <a:rPr lang="en-US"/>
+              <a:t>10</a:t>
+            </a:r>
+          </a:p>
+        </p:txBody>
+      </p:sp>
+      <p:sp>
+        <p:nvSpPr>
+          <p:cNvPr id="6" name="Footer Placeholder 5">
+            <a:extLst>
+              <a:ext uri="{FF2B5EF4-FFF2-40B4-BE49-F238E27FC236}">
+                <a16:creationId xmlns:a16="http://schemas.microsoft.com/office/drawing/2014/main" id="{2F6C81E1-1182-1CB8-474D-C70348165942}"/>
+              </a:ext>
+            </a:extLst>
+          </p:cNvPr>
+          <p:cNvSpPr>
+            <a:spLocks noGrp="1"/>
+          </p:cNvSpPr>
+          <p:nvPr>
+            <p:ph type="ftr" sz="quarter" idx="4"/>
+          </p:nvPr>
+        </p:nvSpPr>
+        <p:spPr>
+          <a:xfrm>
+            <a:off x="0" y="6502400"/>
+            <a:ext cx="3962400" cy="341313"/>
+          </a:xfrm>
+          <a:prstGeom prst="rect">
+            <a:avLst/>
+          </a:prstGeom>
+        </p:spPr>
+        <p:txBody>
+          <a:bodyPr vert="horz" lIns="91440" tIns="45720" rIns="91440" bIns="45720" rtlCol="0" anchor="b"/>
+          <a:lstStyle>
+            <a:lvl1pPr algn="l">
+              <a:defRPr sz="1200"/>
+            </a:lvl1pPr>
+          </a:lstStyle>
+          <a:p>
+            <a:endParaRPr/>
+          </a:p>
+        </p:txBody>
+      </p:sp>
+      <p:sp>
+        <p:nvSpPr>
+          <p:cNvPr id="7" name="Slide Number Placeholder 6">
+            <a:extLst>
+              <a:ext uri="{FF2B5EF4-FFF2-40B4-BE49-F238E27FC236}">
+                <a16:creationId xmlns:a16="http://schemas.microsoft.com/office/drawing/2014/main" id="{84A6D60D-DCCF-8E61-CA1A-CE7CB5CA9BFF}"/>
+              </a:ext>
+            </a:extLst>
+          </p:cNvPr>
+          <p:cNvSpPr>
+            <a:spLocks noGrp="1"/>
+          </p:cNvSpPr>
+          <p:nvPr>
+            <p:ph type="sldNum" sz="quarter" idx="5"/>
+          </p:nvPr>
+        </p:nvSpPr>
+        <p:spPr>
+          <a:xfrm>
+            <a:off x="5180013" y="6502400"/>
+            <a:ext cx="3962400" cy="341313"/>
+          </a:xfrm>
+          <a:prstGeom prst="rect">
+            <a:avLst/>
+          </a:prstGeom>
+        </p:spPr>
+        <p:txBody>
+          <a:bodyPr vert="horz" lIns="91440" tIns="45720" rIns="91440" bIns="45720" rtlCol="0" anchor="b"/>
+          <a:lstStyle>
+            <a:lvl1pPr algn="r">
+              <a:defRPr sz="1200"/>
+            </a:lvl1pPr>
+          </a:lstStyle>
+          <a:p>
+            <a:r>
+              <a:rPr lang="cs-CZ"/>
+              <a:t>‹#›</a:t>
+            </a:r>
+          </a:p>
+        </p:txBody>
+      </p:sp>
+    </p:spTree>
+    <p:extLst>
+      <p:ext uri="{BB962C8B-B14F-4D97-AF65-F5344CB8AC3E}">
+        <p14:creationId xmlns:p14="http://schemas.microsoft.com/office/powerpoint/2010/main" val="2269510771"/>
+      </p:ext>
+    </p:extLst>
+  </p:cSld>
+  <p:clrMapOvr>
+    <a:masterClrMapping/>
+  </p:clrMapOvr>
+</p:notes>
+</file>
+
 <file path=ppt/slideLayouts/slideLayout1.xml><?xml version="1.0" encoding="utf-8"?>
 <p:sldLayout xmlns:a="http://schemas.openxmlformats.org/drawingml/2006/main" xmlns:r="http://schemas.openxmlformats.org/officeDocument/2006/relationships" xmlns:p="http://schemas.openxmlformats.org/presentationml/2006/main" type="title" preserve="1">
   <p:cSld name="Title Slide">
@@ -2418,7 +3219,7 @@
             <a:fld id="{1D8BD707-D9CF-40AE-B4C6-C98DA3205C09}" type="datetimeFigureOut">
               <a:rPr lang="en-US" smtClean="0"/>
               <a:pPr/>
-              <a:t>3/11/2026</a:t>
+              <a:t>4/1/2026</a:t>
             </a:fld>
             <a:endParaRPr lang="en-US"/>
           </a:p>
@@ -2583,7 +3384,7 @@
             <a:fld id="{1D8BD707-D9CF-40AE-B4C6-C98DA3205C09}" type="datetimeFigureOut">
               <a:rPr lang="en-US" smtClean="0"/>
               <a:pPr/>
-              <a:t>3/11/2026</a:t>
+              <a:t>4/1/2026</a:t>
             </a:fld>
             <a:endParaRPr lang="en-US"/>
           </a:p>
@@ -2758,7 +3559,7 @@
             <a:fld id="{1D8BD707-D9CF-40AE-B4C6-C98DA3205C09}" type="datetimeFigureOut">
               <a:rPr lang="en-US" smtClean="0"/>
               <a:pPr/>
-              <a:t>3/11/2026</a:t>
+              <a:t>4/1/2026</a:t>
             </a:fld>
             <a:endParaRPr lang="en-US"/>
           </a:p>
@@ -2923,7 +3724,7 @@
             <a:fld id="{1D8BD707-D9CF-40AE-B4C6-C98DA3205C09}" type="datetimeFigureOut">
               <a:rPr lang="en-US" smtClean="0"/>
               <a:pPr/>
-              <a:t>3/11/2026</a:t>
+              <a:t>4/1/2026</a:t>
             </a:fld>
             <a:endParaRPr lang="en-US"/>
           </a:p>
@@ -3165,7 +3966,7 @@
             <a:fld id="{1D8BD707-D9CF-40AE-B4C6-C98DA3205C09}" type="datetimeFigureOut">
               <a:rPr lang="en-US" smtClean="0"/>
               <a:pPr/>
-              <a:t>3/11/2026</a:t>
+              <a:t>4/1/2026</a:t>
             </a:fld>
             <a:endParaRPr lang="en-US"/>
           </a:p>
@@ -3447,7 +4248,7 @@
             <a:fld id="{1D8BD707-D9CF-40AE-B4C6-C98DA3205C09}" type="datetimeFigureOut">
               <a:rPr lang="en-US" smtClean="0"/>
               <a:pPr/>
-              <a:t>3/11/2026</a:t>
+              <a:t>4/1/2026</a:t>
             </a:fld>
             <a:endParaRPr lang="en-US"/>
           </a:p>
@@ -3863,7 +4664,7 @@
             <a:fld id="{1D8BD707-D9CF-40AE-B4C6-C98DA3205C09}" type="datetimeFigureOut">
               <a:rPr lang="en-US" smtClean="0"/>
               <a:pPr/>
-              <a:t>3/11/2026</a:t>
+              <a:t>4/1/2026</a:t>
             </a:fld>
             <a:endParaRPr lang="en-US"/>
           </a:p>
@@ -3977,7 +4778,7 @@
             <a:fld id="{1D8BD707-D9CF-40AE-B4C6-C98DA3205C09}" type="datetimeFigureOut">
               <a:rPr lang="en-US" smtClean="0"/>
               <a:pPr/>
-              <a:t>3/11/2026</a:t>
+              <a:t>4/1/2026</a:t>
             </a:fld>
             <a:endParaRPr lang="en-US"/>
           </a:p>
@@ -4069,7 +4870,7 @@
             <a:fld id="{1D8BD707-D9CF-40AE-B4C6-C98DA3205C09}" type="datetimeFigureOut">
               <a:rPr lang="en-US" smtClean="0"/>
               <a:pPr/>
-              <a:t>3/11/2026</a:t>
+              <a:t>4/1/2026</a:t>
             </a:fld>
             <a:endParaRPr lang="en-US"/>
           </a:p>
@@ -4341,7 +5142,7 @@
             <a:fld id="{1D8BD707-D9CF-40AE-B4C6-C98DA3205C09}" type="datetimeFigureOut">
               <a:rPr lang="en-US" smtClean="0"/>
               <a:pPr/>
-              <a:t>3/11/2026</a:t>
+              <a:t>4/1/2026</a:t>
             </a:fld>
             <a:endParaRPr lang="en-US"/>
           </a:p>
@@ -4590,7 +5391,7 @@
             <a:fld id="{1D8BD707-D9CF-40AE-B4C6-C98DA3205C09}" type="datetimeFigureOut">
               <a:rPr lang="en-US" smtClean="0"/>
               <a:pPr/>
-              <a:t>3/11/2026</a:t>
+              <a:t>4/1/2026</a:t>
             </a:fld>
             <a:endParaRPr lang="en-US"/>
           </a:p>
@@ -4798,7 +5599,7 @@
             <a:fld id="{1D8BD707-D9CF-40AE-B4C6-C98DA3205C09}" type="datetimeFigureOut">
               <a:rPr lang="en-US" smtClean="0"/>
               <a:pPr/>
-              <a:t>3/11/2026</a:t>
+              <a:t>4/1/2026</a:t>
             </a:fld>
             <a:endParaRPr lang="en-US"/>
           </a:p>
@@ -6838,6 +7639,1455 @@
         </p:txBody>
       </p:sp>
     </p:spTree>
+  </p:cSld>
+  <p:clrMapOvr>
+    <a:masterClrMapping/>
+  </p:clrMapOvr>
+</p:sld>
+</file>
+
+<file path=ppt/slides/slide14.xml><?xml version="1.0" encoding="utf-8"?>
+<p:sld xmlns:a="http://schemas.openxmlformats.org/drawingml/2006/main" xmlns:r="http://schemas.openxmlformats.org/officeDocument/2006/relationships" xmlns:p="http://schemas.openxmlformats.org/presentationml/2006/main">
+  <p:cSld>
+    <p:spTree>
+      <p:nvGrpSpPr>
+        <p:cNvPr id="1" name=""/>
+        <p:cNvGrpSpPr/>
+        <p:nvPr/>
+      </p:nvGrpSpPr>
+      <p:grpSpPr>
+        <a:xfrm>
+          <a:off x="0" y="0"/>
+          <a:ext cx="0" cy="0"/>
+          <a:chOff x="0" y="0"/>
+          <a:chExt cx="0" cy="0"/>
+        </a:xfrm>
+      </p:grpSpPr>
+      <p:sp>
+        <p:nvSpPr>
+          <p:cNvPr id="2" name="Title 1"/>
+          <p:cNvSpPr>
+            <a:spLocks noGrp="1"/>
+          </p:cNvSpPr>
+          <p:nvPr>
+            <p:ph type="title"/>
+          </p:nvPr>
+        </p:nvSpPr>
+        <p:spPr/>
+        <p:txBody>
+          <a:bodyPr/>
+          <a:lstStyle/>
+          <a:p>
+            <a:r>
+              <a:rPr sz="5400" b="1"/>
+              <a:t>Эксперименты</a:t>
+            </a:r>
+          </a:p>
+        </p:txBody>
+      </p:sp>
+      <p:sp>
+        <p:nvSpPr>
+          <p:cNvPr id="3" name="Content Placeholder 2"/>
+          <p:cNvSpPr>
+            <a:spLocks noGrp="1"/>
+          </p:cNvSpPr>
+          <p:nvPr>
+            <p:ph idx="1"/>
+          </p:nvPr>
+        </p:nvSpPr>
+        <p:spPr/>
+        <p:txBody>
+          <a:bodyPr>
+            <a:normAutofit fontScale="92500" lnSpcReduction="20000"/>
+          </a:bodyPr>
+          <a:lstStyle/>
+          <a:p>
+            <a:r>
+              <a:rPr sz="3600"/>
+              <a:t>Точность: на тестовой выборке считаем долю правильных предсказаний (accuracy).</a:t>
+            </a:r>
+          </a:p>
+          <a:p>
+            <a:r>
+              <a:rPr sz="3600"/>
+              <a:t>Время построения KD-Tree: Stopwatch при BuildTree — обычно единицы–десятки миллисекунд.</a:t>
+            </a:r>
+          </a:p>
+          <a:p>
+            <a:r>
+              <a:rPr sz="3600"/>
+              <a:t>Время поиска: для N запросов сравниваем суммарное время KD-Tree и линейного поиска; при больших N KD-Tree выигрывает.</a:t>
+            </a:r>
+          </a:p>
+        </p:txBody>
+      </p:sp>
+    </p:spTree>
+  </p:cSld>
+  <p:clrMapOvr>
+    <a:masterClrMapping/>
+  </p:clrMapOvr>
+</p:sld>
+</file>
+
+<file path=ppt/slides/slide15.xml><?xml version="1.0" encoding="utf-8"?>
+<p:sld xmlns:a="http://schemas.openxmlformats.org/drawingml/2006/main" xmlns:r="http://schemas.openxmlformats.org/officeDocument/2006/relationships" xmlns:p="http://schemas.openxmlformats.org/presentationml/2006/main">
+  <p:cSld>
+    <p:spTree>
+      <p:nvGrpSpPr>
+        <p:cNvPr id="1" name=""/>
+        <p:cNvGrpSpPr/>
+        <p:nvPr/>
+      </p:nvGrpSpPr>
+      <p:grpSpPr>
+        <a:xfrm>
+          <a:off x="0" y="0"/>
+          <a:ext cx="0" cy="0"/>
+          <a:chOff x="0" y="0"/>
+          <a:chExt cx="0" cy="0"/>
+        </a:xfrm>
+      </p:grpSpPr>
+      <p:sp>
+        <p:nvSpPr>
+          <p:cNvPr id="2" name="Title 1"/>
+          <p:cNvSpPr>
+            <a:spLocks noGrp="1"/>
+          </p:cNvSpPr>
+          <p:nvPr>
+            <p:ph type="title"/>
+          </p:nvPr>
+        </p:nvSpPr>
+        <p:spPr/>
+        <p:txBody>
+          <a:bodyPr/>
+          <a:lstStyle/>
+          <a:p>
+            <a:r>
+              <a:rPr sz="5400" b="1"/>
+              <a:t>Интерфейс программы</a:t>
+            </a:r>
+          </a:p>
+        </p:txBody>
+      </p:sp>
+      <p:sp>
+        <p:nvSpPr>
+          <p:cNvPr id="3" name="Content Placeholder 2"/>
+          <p:cNvSpPr>
+            <a:spLocks noGrp="1"/>
+          </p:cNvSpPr>
+          <p:nvPr>
+            <p:ph idx="1"/>
+          </p:nvPr>
+        </p:nvSpPr>
+        <p:spPr/>
+        <p:txBody>
+          <a:bodyPr>
+            <a:normAutofit lnSpcReduction="10000"/>
+          </a:bodyPr>
+          <a:lstStyle/>
+          <a:p>
+            <a:r>
+              <a:rPr sz="3600"/>
+              <a:t>Основное окно: кнопки загрузки, поля выбора k и пути к данным, таблица/список результатов.</a:t>
+            </a:r>
+          </a:p>
+          <a:p>
+            <a:r>
+              <a:rPr sz="3600"/>
+              <a:t>Отображаются: предсказанный класс, фактический класс (если есть), время выполнения, точность.</a:t>
+            </a:r>
+          </a:p>
+          <a:p>
+            <a:r>
+              <a:rPr sz="3600"/>
+              <a:t>Подпись к скриншоту: «Основное окно системы».</a:t>
+            </a:r>
+          </a:p>
+        </p:txBody>
+      </p:sp>
+    </p:spTree>
+  </p:cSld>
+  <p:clrMapOvr>
+    <a:masterClrMapping/>
+  </p:clrMapOvr>
+</p:sld>
+</file>
+
+<file path=ppt/slides/slide16.xml><?xml version="1.0" encoding="utf-8"?>
+<p:sld xmlns:a="http://schemas.openxmlformats.org/drawingml/2006/main" xmlns:r="http://schemas.openxmlformats.org/officeDocument/2006/relationships" xmlns:p="http://schemas.openxmlformats.org/presentationml/2006/main">
+  <p:cSld>
+    <p:spTree>
+      <p:nvGrpSpPr>
+        <p:cNvPr id="1" name=""/>
+        <p:cNvGrpSpPr/>
+        <p:nvPr/>
+      </p:nvGrpSpPr>
+      <p:grpSpPr>
+        <a:xfrm>
+          <a:off x="0" y="0"/>
+          <a:ext cx="0" cy="0"/>
+          <a:chOff x="0" y="0"/>
+          <a:chExt cx="0" cy="0"/>
+        </a:xfrm>
+      </p:grpSpPr>
+      <p:sp>
+        <p:nvSpPr>
+          <p:cNvPr id="2" name="Title 1"/>
+          <p:cNvSpPr>
+            <a:spLocks noGrp="1"/>
+          </p:cNvSpPr>
+          <p:nvPr>
+            <p:ph type="title"/>
+          </p:nvPr>
+        </p:nvSpPr>
+        <p:spPr/>
+        <p:txBody>
+          <a:bodyPr>
+            <a:normAutofit fontScale="90000"/>
+          </a:bodyPr>
+          <a:lstStyle/>
+          <a:p>
+            <a:r>
+              <a:rPr sz="5400" b="1"/>
+              <a:t>Функциональные возможности</a:t>
+            </a:r>
+          </a:p>
+        </p:txBody>
+      </p:sp>
+      <p:sp>
+        <p:nvSpPr>
+          <p:cNvPr id="3" name="Content Placeholder 2"/>
+          <p:cNvSpPr>
+            <a:spLocks noGrp="1"/>
+          </p:cNvSpPr>
+          <p:nvPr>
+            <p:ph idx="1"/>
+          </p:nvPr>
+        </p:nvSpPr>
+        <p:spPr/>
+        <p:txBody>
+          <a:bodyPr>
+            <a:normAutofit fontScale="92500"/>
+          </a:bodyPr>
+          <a:lstStyle/>
+          <a:p>
+            <a:r>
+              <a:rPr sz="3600"/>
+              <a:t>Загрузка изображений по классам, извлечение признаков, сохранение в БД.</a:t>
+            </a:r>
+          </a:p>
+          <a:p>
+            <a:r>
+              <a:rPr sz="3600"/>
+              <a:t>Обучение: построение KD-Tree, сохранение модели, выбор k.</a:t>
+            </a:r>
+          </a:p>
+          <a:p>
+            <a:r>
+              <a:rPr sz="3600"/>
+              <a:t>Классификация: по одному изображению или пакетом; вывод результата и времени.</a:t>
+            </a:r>
+          </a:p>
+          <a:p>
+            <a:r>
+              <a:rPr sz="3600"/>
+              <a:t>Просмотр экспериментов: точность, время KD-Tree vs линейного поиска.</a:t>
+            </a:r>
+          </a:p>
+        </p:txBody>
+      </p:sp>
+    </p:spTree>
+  </p:cSld>
+  <p:clrMapOvr>
+    <a:masterClrMapping/>
+  </p:clrMapOvr>
+</p:sld>
+</file>
+
+<file path=ppt/slides/slide17.xml><?xml version="1.0" encoding="utf-8"?>
+<p:sld xmlns:a="http://schemas.openxmlformats.org/drawingml/2006/main" xmlns:r="http://schemas.openxmlformats.org/officeDocument/2006/relationships" xmlns:p="http://schemas.openxmlformats.org/presentationml/2006/main">
+  <p:cSld>
+    <p:spTree>
+      <p:nvGrpSpPr>
+        <p:cNvPr id="1" name="">
+          <a:extLst>
+            <a:ext uri="{FF2B5EF4-FFF2-40B4-BE49-F238E27FC236}">
+              <a16:creationId xmlns:a16="http://schemas.microsoft.com/office/drawing/2014/main" id="{598271BD-5285-91E2-FE5D-145D5D5BA46F}"/>
+            </a:ext>
+          </a:extLst>
+        </p:cNvPr>
+        <p:cNvGrpSpPr/>
+        <p:nvPr/>
+      </p:nvGrpSpPr>
+      <p:grpSpPr>
+        <a:xfrm>
+          <a:off x="0" y="0"/>
+          <a:ext cx="0" cy="0"/>
+          <a:chOff x="0" y="0"/>
+          <a:chExt cx="0" cy="0"/>
+        </a:xfrm>
+      </p:grpSpPr>
+      <p:grpSp>
+        <p:nvGrpSpPr>
+          <p:cNvPr id="2" name="Group 2">
+            <a:extLst>
+              <a:ext uri="{FF2B5EF4-FFF2-40B4-BE49-F238E27FC236}">
+                <a16:creationId xmlns:a16="http://schemas.microsoft.com/office/drawing/2014/main" id="{76A2A9DB-E92D-363D-70DF-74EFF3D82883}"/>
+              </a:ext>
+            </a:extLst>
+          </p:cNvPr>
+          <p:cNvGrpSpPr/>
+          <p:nvPr/>
+        </p:nvGrpSpPr>
+        <p:grpSpPr>
+          <a:xfrm>
+            <a:off x="0" y="0"/>
+            <a:ext cx="18288000" cy="10287000"/>
+            <a:chOff x="0" y="0"/>
+            <a:chExt cx="24384000" cy="13716000"/>
+          </a:xfrm>
+        </p:grpSpPr>
+        <p:sp>
+          <p:nvSpPr>
+            <p:cNvPr id="3" name="Freeform 3">
+              <a:extLst>
+                <a:ext uri="{FF2B5EF4-FFF2-40B4-BE49-F238E27FC236}">
+                  <a16:creationId xmlns:a16="http://schemas.microsoft.com/office/drawing/2014/main" id="{35756B7C-8D6B-D7A9-6D18-303DCEFFD585}"/>
+                </a:ext>
+              </a:extLst>
+            </p:cNvPr>
+            <p:cNvSpPr/>
+            <p:nvPr/>
+          </p:nvSpPr>
+          <p:spPr>
+            <a:xfrm>
+              <a:off x="0" y="0"/>
+              <a:ext cx="24384000" cy="13716000"/>
+            </a:xfrm>
+            <a:custGeom>
+              <a:avLst/>
+              <a:gdLst/>
+              <a:ahLst/>
+              <a:cxnLst/>
+              <a:rect l="l" t="t" r="r" b="b"/>
+              <a:pathLst>
+                <a:path w="24384000" h="13716000">
+                  <a:moveTo>
+                    <a:pt x="0" y="0"/>
+                  </a:moveTo>
+                  <a:lnTo>
+                    <a:pt x="24384000" y="0"/>
+                  </a:lnTo>
+                  <a:lnTo>
+                    <a:pt x="24384000" y="13716000"/>
+                  </a:lnTo>
+                  <a:lnTo>
+                    <a:pt x="0" y="13716000"/>
+                  </a:lnTo>
+                  <a:close/>
+                </a:path>
+              </a:pathLst>
+            </a:custGeom>
+            <a:solidFill>
+              <a:srgbClr val="DEEEFF"/>
+            </a:solidFill>
+          </p:spPr>
+        </p:sp>
+      </p:grpSp>
+      <p:grpSp>
+        <p:nvGrpSpPr>
+          <p:cNvPr id="4" name="Group 4">
+            <a:extLst>
+              <a:ext uri="{FF2B5EF4-FFF2-40B4-BE49-F238E27FC236}">
+                <a16:creationId xmlns:a16="http://schemas.microsoft.com/office/drawing/2014/main" id="{68DFCAB2-2A2C-959B-24AA-0BDA29BCCDC0}"/>
+              </a:ext>
+            </a:extLst>
+          </p:cNvPr>
+          <p:cNvGrpSpPr/>
+          <p:nvPr/>
+        </p:nvGrpSpPr>
+        <p:grpSpPr>
+          <a:xfrm>
+            <a:off x="26831" y="0"/>
+            <a:ext cx="18288000" cy="10287000"/>
+            <a:chOff x="0" y="0"/>
+            <a:chExt cx="24384000" cy="13716000"/>
+          </a:xfrm>
+        </p:grpSpPr>
+        <p:sp>
+          <p:nvSpPr>
+            <p:cNvPr id="5" name="Freeform 5">
+              <a:extLst>
+                <a:ext uri="{FF2B5EF4-FFF2-40B4-BE49-F238E27FC236}">
+                  <a16:creationId xmlns:a16="http://schemas.microsoft.com/office/drawing/2014/main" id="{DE3D7A39-657B-6710-A1C8-176108CB7419}"/>
+                </a:ext>
+              </a:extLst>
+            </p:cNvPr>
+            <p:cNvSpPr/>
+            <p:nvPr/>
+          </p:nvSpPr>
+          <p:spPr>
+            <a:xfrm>
+              <a:off x="0" y="0"/>
+              <a:ext cx="24384000" cy="13716000"/>
+            </a:xfrm>
+            <a:custGeom>
+              <a:avLst/>
+              <a:gdLst/>
+              <a:ahLst/>
+              <a:cxnLst/>
+              <a:rect l="l" t="t" r="r" b="b"/>
+              <a:pathLst>
+                <a:path w="24384000" h="13716000">
+                  <a:moveTo>
+                    <a:pt x="0" y="0"/>
+                  </a:moveTo>
+                  <a:lnTo>
+                    <a:pt x="24384000" y="0"/>
+                  </a:lnTo>
+                  <a:lnTo>
+                    <a:pt x="24384000" y="13716000"/>
+                  </a:lnTo>
+                  <a:lnTo>
+                    <a:pt x="0" y="13716000"/>
+                  </a:lnTo>
+                  <a:close/>
+                </a:path>
+              </a:pathLst>
+            </a:custGeom>
+            <a:solidFill>
+              <a:srgbClr val="FFFFFF"/>
+            </a:solidFill>
+          </p:spPr>
+        </p:sp>
+      </p:grpSp>
+      <p:sp>
+        <p:nvSpPr>
+          <p:cNvPr id="6" name="TextBox 6">
+            <a:extLst>
+              <a:ext uri="{FF2B5EF4-FFF2-40B4-BE49-F238E27FC236}">
+                <a16:creationId xmlns:a16="http://schemas.microsoft.com/office/drawing/2014/main" id="{6017079D-BB83-4A10-0DD2-2B3E786AA8BC}"/>
+              </a:ext>
+            </a:extLst>
+          </p:cNvPr>
+          <p:cNvSpPr txBox="1"/>
+          <p:nvPr/>
+        </p:nvSpPr>
+        <p:spPr>
+          <a:xfrm>
+            <a:off x="762819" y="1066978"/>
+            <a:ext cx="16762362" cy="718145"/>
+          </a:xfrm>
+          <a:prstGeom prst="rect">
+            <a:avLst/>
+          </a:prstGeom>
+        </p:spPr>
+        <p:txBody>
+          <a:bodyPr wrap="square" lIns="0" tIns="0" rIns="0" bIns="0" rtlCol="0" anchor="t">
+            <a:spAutoFit/>
+          </a:bodyPr>
+          <a:lstStyle/>
+          <a:p>
+            <a:pPr algn="ctr">
+              <a:lnSpc>
+                <a:spcPts val="5562"/>
+              </a:lnSpc>
+            </a:pPr>
+            <a:r>
+              <a:rPr lang="ru-RU" sz="4800" dirty="0">
+                <a:solidFill>
+                  <a:srgbClr val="091C53"/>
+                </a:solidFill>
+                <a:latin typeface="Times New Roman"/>
+                <a:ea typeface="Times New Roman"/>
+                <a:cs typeface="Times New Roman"/>
+                <a:sym typeface="Times New Roman"/>
+              </a:rPr>
+              <a:t>Практическая значимость</a:t>
+            </a:r>
+            <a:endParaRPr lang="en-US" sz="4800" dirty="0">
+              <a:solidFill>
+                <a:srgbClr val="091C53"/>
+              </a:solidFill>
+              <a:latin typeface="Times New Roman"/>
+              <a:ea typeface="Times New Roman"/>
+              <a:cs typeface="Times New Roman"/>
+              <a:sym typeface="Times New Roman"/>
+            </a:endParaRPr>
+          </a:p>
+        </p:txBody>
+      </p:sp>
+      <p:sp>
+        <p:nvSpPr>
+          <p:cNvPr id="8" name="TextBox 8">
+            <a:extLst>
+              <a:ext uri="{FF2B5EF4-FFF2-40B4-BE49-F238E27FC236}">
+                <a16:creationId xmlns:a16="http://schemas.microsoft.com/office/drawing/2014/main" id="{C582F4B2-FD96-5DFA-9854-412595979AE0}"/>
+              </a:ext>
+            </a:extLst>
+          </p:cNvPr>
+          <p:cNvSpPr txBox="1"/>
+          <p:nvPr/>
+        </p:nvSpPr>
+        <p:spPr>
+          <a:xfrm>
+            <a:off x="762820" y="2878931"/>
+            <a:ext cx="4418782" cy="1969770"/>
+          </a:xfrm>
+          <a:prstGeom prst="rect">
+            <a:avLst/>
+          </a:prstGeom>
+        </p:spPr>
+        <p:txBody>
+          <a:bodyPr wrap="square" lIns="0" tIns="0" rIns="0" bIns="0" rtlCol="0" anchor="t">
+            <a:spAutoFit/>
+          </a:bodyPr>
+          <a:lstStyle/>
+          <a:p>
+            <a:r>
+              <a:rPr lang="ru-RU" sz="3200" dirty="0">
+                <a:solidFill>
+                  <a:schemeClr val="tx2"/>
+                </a:solidFill>
+              </a:rPr>
+              <a:t>Учебная ценность: живая демонстрация </a:t>
+            </a:r>
+            <a:r>
+              <a:rPr lang="ru-RU" sz="3200" dirty="0" err="1">
+                <a:solidFill>
+                  <a:schemeClr val="tx2"/>
+                </a:solidFill>
+              </a:rPr>
+              <a:t>kNN</a:t>
+            </a:r>
+            <a:r>
+              <a:rPr lang="ru-RU" sz="3200" dirty="0">
+                <a:solidFill>
+                  <a:schemeClr val="tx2"/>
+                </a:solidFill>
+              </a:rPr>
+              <a:t>, KD-</a:t>
+            </a:r>
+            <a:r>
+              <a:rPr lang="ru-RU" sz="3200" dirty="0" err="1">
+                <a:solidFill>
+                  <a:schemeClr val="tx2"/>
+                </a:solidFill>
+              </a:rPr>
+              <a:t>Tree</a:t>
+            </a:r>
+            <a:r>
+              <a:rPr lang="ru-RU" sz="3200" dirty="0">
+                <a:solidFill>
+                  <a:schemeClr val="tx2"/>
+                </a:solidFill>
+              </a:rPr>
+              <a:t>, оценки сложности на реальном коде.</a:t>
+            </a:r>
+          </a:p>
+        </p:txBody>
+      </p:sp>
+      <p:sp>
+        <p:nvSpPr>
+          <p:cNvPr id="10" name="TextBox 10">
+            <a:extLst>
+              <a:ext uri="{FF2B5EF4-FFF2-40B4-BE49-F238E27FC236}">
+                <a16:creationId xmlns:a16="http://schemas.microsoft.com/office/drawing/2014/main" id="{38E80D92-061A-6E2F-E94E-4F51CF4FA622}"/>
+              </a:ext>
+            </a:extLst>
+          </p:cNvPr>
+          <p:cNvSpPr txBox="1"/>
+          <p:nvPr/>
+        </p:nvSpPr>
+        <p:spPr>
+          <a:xfrm>
+            <a:off x="5715000" y="2878931"/>
+            <a:ext cx="5791199" cy="1969770"/>
+          </a:xfrm>
+          <a:prstGeom prst="rect">
+            <a:avLst/>
+          </a:prstGeom>
+        </p:spPr>
+        <p:txBody>
+          <a:bodyPr wrap="square" lIns="0" tIns="0" rIns="0" bIns="0" rtlCol="0" anchor="t">
+            <a:spAutoFit/>
+          </a:bodyPr>
+          <a:lstStyle/>
+          <a:p>
+            <a:r>
+              <a:rPr lang="ru-RU" sz="3200" dirty="0">
+                <a:solidFill>
+                  <a:schemeClr val="tx2"/>
+                </a:solidFill>
+              </a:rPr>
+              <a:t>Базовый прототип для более сложных систем: можно заменить признаки, метрику, добавить предобработку.</a:t>
+            </a:r>
+          </a:p>
+        </p:txBody>
+      </p:sp>
+      <p:sp>
+        <p:nvSpPr>
+          <p:cNvPr id="12" name="TextBox 12">
+            <a:extLst>
+              <a:ext uri="{FF2B5EF4-FFF2-40B4-BE49-F238E27FC236}">
+                <a16:creationId xmlns:a16="http://schemas.microsoft.com/office/drawing/2014/main" id="{676B4A20-4BB7-6A79-7049-7FD95531EE39}"/>
+              </a:ext>
+            </a:extLst>
+          </p:cNvPr>
+          <p:cNvSpPr txBox="1"/>
+          <p:nvPr/>
+        </p:nvSpPr>
+        <p:spPr>
+          <a:xfrm>
+            <a:off x="12237539" y="2878931"/>
+            <a:ext cx="5517061" cy="2215991"/>
+          </a:xfrm>
+          <a:prstGeom prst="rect">
+            <a:avLst/>
+          </a:prstGeom>
+        </p:spPr>
+        <p:txBody>
+          <a:bodyPr wrap="square" lIns="0" tIns="0" rIns="0" bIns="0" rtlCol="0" anchor="t">
+            <a:spAutoFit/>
+          </a:bodyPr>
+          <a:lstStyle/>
+          <a:p>
+            <a:r>
+              <a:rPr lang="ru-RU" sz="3600" dirty="0">
+                <a:solidFill>
+                  <a:schemeClr val="tx2"/>
+                </a:solidFill>
+              </a:rPr>
+              <a:t>Результаты экспериментов и код можно использовать в курсе «Алгоритмы и структуры данных».</a:t>
+            </a:r>
+          </a:p>
+        </p:txBody>
+      </p:sp>
+    </p:spTree>
+    <p:extLst>
+      <p:ext uri="{BB962C8B-B14F-4D97-AF65-F5344CB8AC3E}">
+        <p14:creationId xmlns:p14="http://schemas.microsoft.com/office/powerpoint/2010/main" val="2245347548"/>
+      </p:ext>
+    </p:extLst>
+  </p:cSld>
+  <p:clrMapOvr>
+    <a:masterClrMapping/>
+  </p:clrMapOvr>
+</p:sld>
+</file>
+
+<file path=ppt/slides/slide18.xml><?xml version="1.0" encoding="utf-8"?>
+<p:sld xmlns:a="http://schemas.openxmlformats.org/drawingml/2006/main" xmlns:r="http://schemas.openxmlformats.org/officeDocument/2006/relationships" xmlns:p="http://schemas.openxmlformats.org/presentationml/2006/main">
+  <p:cSld>
+    <p:spTree>
+      <p:nvGrpSpPr>
+        <p:cNvPr id="1" name="">
+          <a:extLst>
+            <a:ext uri="{FF2B5EF4-FFF2-40B4-BE49-F238E27FC236}">
+              <a16:creationId xmlns:a16="http://schemas.microsoft.com/office/drawing/2014/main" id="{6BA6F6D8-EA5D-E0E1-23BE-FA71F8C6F59C}"/>
+            </a:ext>
+          </a:extLst>
+        </p:cNvPr>
+        <p:cNvGrpSpPr/>
+        <p:nvPr/>
+      </p:nvGrpSpPr>
+      <p:grpSpPr>
+        <a:xfrm>
+          <a:off x="0" y="0"/>
+          <a:ext cx="0" cy="0"/>
+          <a:chOff x="0" y="0"/>
+          <a:chExt cx="0" cy="0"/>
+        </a:xfrm>
+      </p:grpSpPr>
+      <p:grpSp>
+        <p:nvGrpSpPr>
+          <p:cNvPr id="2" name="Group 2">
+            <a:extLst>
+              <a:ext uri="{FF2B5EF4-FFF2-40B4-BE49-F238E27FC236}">
+                <a16:creationId xmlns:a16="http://schemas.microsoft.com/office/drawing/2014/main" id="{985E0D57-2279-7BB8-DEA4-6DFED668C82C}"/>
+              </a:ext>
+            </a:extLst>
+          </p:cNvPr>
+          <p:cNvGrpSpPr/>
+          <p:nvPr/>
+        </p:nvGrpSpPr>
+        <p:grpSpPr>
+          <a:xfrm>
+            <a:off x="0" y="0"/>
+            <a:ext cx="18288000" cy="10287000"/>
+            <a:chOff x="0" y="0"/>
+            <a:chExt cx="24384000" cy="13716000"/>
+          </a:xfrm>
+        </p:grpSpPr>
+        <p:sp>
+          <p:nvSpPr>
+            <p:cNvPr id="3" name="Freeform 3">
+              <a:extLst>
+                <a:ext uri="{FF2B5EF4-FFF2-40B4-BE49-F238E27FC236}">
+                  <a16:creationId xmlns:a16="http://schemas.microsoft.com/office/drawing/2014/main" id="{DAA5C7C2-0E19-404E-EC99-AEB21EE0D78F}"/>
+                </a:ext>
+              </a:extLst>
+            </p:cNvPr>
+            <p:cNvSpPr/>
+            <p:nvPr/>
+          </p:nvSpPr>
+          <p:spPr>
+            <a:xfrm>
+              <a:off x="0" y="0"/>
+              <a:ext cx="24384000" cy="13716000"/>
+            </a:xfrm>
+            <a:custGeom>
+              <a:avLst/>
+              <a:gdLst/>
+              <a:ahLst/>
+              <a:cxnLst/>
+              <a:rect l="l" t="t" r="r" b="b"/>
+              <a:pathLst>
+                <a:path w="24384000" h="13716000">
+                  <a:moveTo>
+                    <a:pt x="0" y="0"/>
+                  </a:moveTo>
+                  <a:lnTo>
+                    <a:pt x="24384000" y="0"/>
+                  </a:lnTo>
+                  <a:lnTo>
+                    <a:pt x="24384000" y="13716000"/>
+                  </a:lnTo>
+                  <a:lnTo>
+                    <a:pt x="0" y="13716000"/>
+                  </a:lnTo>
+                  <a:close/>
+                </a:path>
+              </a:pathLst>
+            </a:custGeom>
+            <a:solidFill>
+              <a:srgbClr val="DEEEFF"/>
+            </a:solidFill>
+          </p:spPr>
+        </p:sp>
+      </p:grpSp>
+      <p:grpSp>
+        <p:nvGrpSpPr>
+          <p:cNvPr id="4" name="Group 4">
+            <a:extLst>
+              <a:ext uri="{FF2B5EF4-FFF2-40B4-BE49-F238E27FC236}">
+                <a16:creationId xmlns:a16="http://schemas.microsoft.com/office/drawing/2014/main" id="{02572B50-2F81-E6A9-2313-9E3184E9471F}"/>
+              </a:ext>
+            </a:extLst>
+          </p:cNvPr>
+          <p:cNvGrpSpPr/>
+          <p:nvPr/>
+        </p:nvGrpSpPr>
+        <p:grpSpPr>
+          <a:xfrm>
+            <a:off x="-12879" y="-190500"/>
+            <a:ext cx="18288000" cy="10287000"/>
+            <a:chOff x="-34344" y="0"/>
+            <a:chExt cx="24384000" cy="13716000"/>
+          </a:xfrm>
+        </p:grpSpPr>
+        <p:sp>
+          <p:nvSpPr>
+            <p:cNvPr id="5" name="Freeform 5">
+              <a:extLst>
+                <a:ext uri="{FF2B5EF4-FFF2-40B4-BE49-F238E27FC236}">
+                  <a16:creationId xmlns:a16="http://schemas.microsoft.com/office/drawing/2014/main" id="{094D5925-671E-E943-3390-88B1F5277512}"/>
+                </a:ext>
+              </a:extLst>
+            </p:cNvPr>
+            <p:cNvSpPr/>
+            <p:nvPr/>
+          </p:nvSpPr>
+          <p:spPr>
+            <a:xfrm>
+              <a:off x="-34344" y="0"/>
+              <a:ext cx="24384000" cy="13716000"/>
+            </a:xfrm>
+            <a:custGeom>
+              <a:avLst/>
+              <a:gdLst/>
+              <a:ahLst/>
+              <a:cxnLst/>
+              <a:rect l="l" t="t" r="r" b="b"/>
+              <a:pathLst>
+                <a:path w="24384000" h="13716000">
+                  <a:moveTo>
+                    <a:pt x="0" y="0"/>
+                  </a:moveTo>
+                  <a:lnTo>
+                    <a:pt x="24384000" y="0"/>
+                  </a:lnTo>
+                  <a:lnTo>
+                    <a:pt x="24384000" y="13716000"/>
+                  </a:lnTo>
+                  <a:lnTo>
+                    <a:pt x="0" y="13716000"/>
+                  </a:lnTo>
+                  <a:close/>
+                </a:path>
+              </a:pathLst>
+            </a:custGeom>
+            <a:solidFill>
+              <a:srgbClr val="FFFFFF"/>
+            </a:solidFill>
+          </p:spPr>
+        </p:sp>
+      </p:grpSp>
+      <p:sp>
+        <p:nvSpPr>
+          <p:cNvPr id="6" name="TextBox 6">
+            <a:extLst>
+              <a:ext uri="{FF2B5EF4-FFF2-40B4-BE49-F238E27FC236}">
+                <a16:creationId xmlns:a16="http://schemas.microsoft.com/office/drawing/2014/main" id="{16435023-7C0F-D5FE-40DB-96A4A1D93212}"/>
+              </a:ext>
+            </a:extLst>
+          </p:cNvPr>
+          <p:cNvSpPr txBox="1"/>
+          <p:nvPr/>
+        </p:nvSpPr>
+        <p:spPr>
+          <a:xfrm>
+            <a:off x="995458" y="386180"/>
+            <a:ext cx="16149541" cy="718145"/>
+          </a:xfrm>
+          <a:prstGeom prst="rect">
+            <a:avLst/>
+          </a:prstGeom>
+        </p:spPr>
+        <p:txBody>
+          <a:bodyPr wrap="square" lIns="0" tIns="0" rIns="0" bIns="0" rtlCol="0" anchor="t">
+            <a:spAutoFit/>
+          </a:bodyPr>
+          <a:lstStyle/>
+          <a:p>
+            <a:pPr algn="ctr">
+              <a:lnSpc>
+                <a:spcPts val="5562"/>
+              </a:lnSpc>
+            </a:pPr>
+            <a:r>
+              <a:rPr lang="ru-RU" sz="5400" dirty="0">
+                <a:solidFill>
+                  <a:srgbClr val="091C53"/>
+                </a:solidFill>
+                <a:latin typeface="Times New Roman"/>
+                <a:ea typeface="Times New Roman"/>
+                <a:cs typeface="Times New Roman"/>
+                <a:sym typeface="Times New Roman"/>
+              </a:rPr>
+              <a:t>Выводы</a:t>
+            </a:r>
+            <a:endParaRPr lang="en-US" sz="4800" dirty="0">
+              <a:solidFill>
+                <a:srgbClr val="091C53"/>
+              </a:solidFill>
+              <a:latin typeface="Times New Roman"/>
+              <a:ea typeface="Times New Roman"/>
+              <a:cs typeface="Times New Roman"/>
+              <a:sym typeface="Times New Roman"/>
+            </a:endParaRPr>
+          </a:p>
+        </p:txBody>
+      </p:sp>
+      <p:sp>
+        <p:nvSpPr>
+          <p:cNvPr id="9" name="TextBox 9">
+            <a:extLst>
+              <a:ext uri="{FF2B5EF4-FFF2-40B4-BE49-F238E27FC236}">
+                <a16:creationId xmlns:a16="http://schemas.microsoft.com/office/drawing/2014/main" id="{604312AB-A7FC-125B-7717-0642CB4C71C1}"/>
+              </a:ext>
+            </a:extLst>
+          </p:cNvPr>
+          <p:cNvSpPr txBox="1"/>
+          <p:nvPr/>
+        </p:nvSpPr>
+        <p:spPr>
+          <a:xfrm>
+            <a:off x="685800" y="2579631"/>
+            <a:ext cx="7433258" cy="2215991"/>
+          </a:xfrm>
+          <a:prstGeom prst="rect">
+            <a:avLst/>
+          </a:prstGeom>
+        </p:spPr>
+        <p:txBody>
+          <a:bodyPr wrap="square" lIns="0" tIns="0" rIns="0" bIns="0" rtlCol="0" anchor="t">
+            <a:spAutoFit/>
+          </a:bodyPr>
+          <a:lstStyle/>
+          <a:p>
+            <a:pPr marL="457200" indent="-457200">
+              <a:buFont typeface="Arial" panose="020B0604020202020204" pitchFamily="34" charset="0"/>
+              <a:buChar char="•"/>
+            </a:pPr>
+            <a:r>
+              <a:rPr lang="ru-RU" sz="3600" dirty="0">
+                <a:solidFill>
+                  <a:schemeClr val="tx2"/>
+                </a:solidFill>
+                <a:latin typeface="Times New Roman" panose="02020603050405020304" pitchFamily="18" charset="0"/>
+                <a:cs typeface="Times New Roman" panose="02020603050405020304" pitchFamily="18" charset="0"/>
+              </a:rPr>
+              <a:t>Реализована система распознавания цифр и фигур на </a:t>
+            </a:r>
+            <a:r>
+              <a:rPr lang="ru-RU" sz="3600" dirty="0" err="1">
+                <a:solidFill>
+                  <a:schemeClr val="tx2"/>
+                </a:solidFill>
+                <a:latin typeface="Times New Roman" panose="02020603050405020304" pitchFamily="18" charset="0"/>
+                <a:cs typeface="Times New Roman" panose="02020603050405020304" pitchFamily="18" charset="0"/>
+              </a:rPr>
+              <a:t>kNN</a:t>
+            </a:r>
+            <a:r>
+              <a:rPr lang="ru-RU" sz="3600" dirty="0">
+                <a:solidFill>
+                  <a:schemeClr val="tx2"/>
+                </a:solidFill>
+                <a:latin typeface="Times New Roman" panose="02020603050405020304" pitchFamily="18" charset="0"/>
+                <a:cs typeface="Times New Roman" panose="02020603050405020304" pitchFamily="18" charset="0"/>
+              </a:rPr>
+              <a:t> без ML-библиотек; KD-</a:t>
+            </a:r>
+            <a:r>
+              <a:rPr lang="ru-RU" sz="3600" dirty="0" err="1">
+                <a:solidFill>
+                  <a:schemeClr val="tx2"/>
+                </a:solidFill>
+                <a:latin typeface="Times New Roman" panose="02020603050405020304" pitchFamily="18" charset="0"/>
+                <a:cs typeface="Times New Roman" panose="02020603050405020304" pitchFamily="18" charset="0"/>
+              </a:rPr>
+              <a:t>Tree</a:t>
+            </a:r>
+            <a:r>
+              <a:rPr lang="ru-RU" sz="3600" dirty="0">
+                <a:solidFill>
+                  <a:schemeClr val="tx2"/>
+                </a:solidFill>
+                <a:latin typeface="Times New Roman" panose="02020603050405020304" pitchFamily="18" charset="0"/>
+                <a:cs typeface="Times New Roman" panose="02020603050405020304" pitchFamily="18" charset="0"/>
+              </a:rPr>
+              <a:t> и </a:t>
+            </a:r>
+            <a:r>
+              <a:rPr lang="ru-RU" sz="3600" dirty="0" err="1">
+                <a:solidFill>
+                  <a:schemeClr val="tx2"/>
+                </a:solidFill>
+                <a:latin typeface="Times New Roman" panose="02020603050405020304" pitchFamily="18" charset="0"/>
+                <a:cs typeface="Times New Roman" panose="02020603050405020304" pitchFamily="18" charset="0"/>
+              </a:rPr>
+              <a:t>kNN</a:t>
+            </a:r>
+            <a:r>
+              <a:rPr lang="ru-RU" sz="3600" dirty="0">
+                <a:solidFill>
+                  <a:schemeClr val="tx2"/>
+                </a:solidFill>
+                <a:latin typeface="Times New Roman" panose="02020603050405020304" pitchFamily="18" charset="0"/>
+                <a:cs typeface="Times New Roman" panose="02020603050405020304" pitchFamily="18" charset="0"/>
+              </a:rPr>
+              <a:t> написаны вручную.</a:t>
+            </a:r>
+          </a:p>
+        </p:txBody>
+      </p:sp>
+      <p:sp>
+        <p:nvSpPr>
+          <p:cNvPr id="23" name="Content Placeholder 2">
+            <a:extLst>
+              <a:ext uri="{FF2B5EF4-FFF2-40B4-BE49-F238E27FC236}">
+                <a16:creationId xmlns:a16="http://schemas.microsoft.com/office/drawing/2014/main" id="{197FB184-93B5-3137-29A5-DA0C6D21C79A}"/>
+              </a:ext>
+            </a:extLst>
+          </p:cNvPr>
+          <p:cNvSpPr txBox="1">
+            <a:spLocks/>
+          </p:cNvSpPr>
+          <p:nvPr/>
+        </p:nvSpPr>
+        <p:spPr>
+          <a:xfrm>
+            <a:off x="9940344" y="2652536"/>
+            <a:ext cx="8229600" cy="2462214"/>
+          </a:xfrm>
+          <a:prstGeom prst="rect">
+            <a:avLst/>
+          </a:prstGeom>
+        </p:spPr>
+        <p:txBody>
+          <a:bodyPr>
+            <a:normAutofit/>
+          </a:bodyPr>
+          <a:lstStyle>
+            <a:lvl1pPr marL="342900" indent="-342900" algn="l" defTabSz="914400" rtl="0" eaLnBrk="1" latinLnBrk="0" hangingPunct="1">
+              <a:spcBef>
+                <a:spcPct val="20000"/>
+              </a:spcBef>
+              <a:buFont typeface="Arial" pitchFamily="34" charset="0"/>
+              <a:buChar char="•"/>
+              <a:defRPr sz="3200" kern="1200">
+                <a:solidFill>
+                  <a:schemeClr val="tx1"/>
+                </a:solidFill>
+                <a:latin typeface="+mn-lt"/>
+                <a:ea typeface="+mn-ea"/>
+                <a:cs typeface="+mn-cs"/>
+              </a:defRPr>
+            </a:lvl1pPr>
+            <a:lvl2pPr marL="742950" indent="-285750" algn="l" defTabSz="914400" rtl="0" eaLnBrk="1" latinLnBrk="0" hangingPunct="1">
+              <a:spcBef>
+                <a:spcPct val="20000"/>
+              </a:spcBef>
+              <a:buFont typeface="Arial" pitchFamily="34" charset="0"/>
+              <a:buChar char="–"/>
+              <a:defRPr sz="2800" kern="1200">
+                <a:solidFill>
+                  <a:schemeClr val="tx1"/>
+                </a:solidFill>
+                <a:latin typeface="+mn-lt"/>
+                <a:ea typeface="+mn-ea"/>
+                <a:cs typeface="+mn-cs"/>
+              </a:defRPr>
+            </a:lvl2pPr>
+            <a:lvl3pPr marL="1143000" indent="-228600" algn="l" defTabSz="914400" rtl="0" eaLnBrk="1" latinLnBrk="0" hangingPunct="1">
+              <a:spcBef>
+                <a:spcPct val="20000"/>
+              </a:spcBef>
+              <a:buFont typeface="Arial" pitchFamily="34" charset="0"/>
+              <a:buChar char="•"/>
+              <a:defRPr sz="2400" kern="1200">
+                <a:solidFill>
+                  <a:schemeClr val="tx1"/>
+                </a:solidFill>
+                <a:latin typeface="+mn-lt"/>
+                <a:ea typeface="+mn-ea"/>
+                <a:cs typeface="+mn-cs"/>
+              </a:defRPr>
+            </a:lvl3pPr>
+            <a:lvl4pPr marL="1600200" indent="-228600" algn="l" defTabSz="914400" rtl="0" eaLnBrk="1" latinLnBrk="0" hangingPunct="1">
+              <a:spcBef>
+                <a:spcPct val="20000"/>
+              </a:spcBef>
+              <a:buFont typeface="Arial" pitchFamily="34" charset="0"/>
+              <a:buChar char="–"/>
+              <a:defRPr sz="2000" kern="1200">
+                <a:solidFill>
+                  <a:schemeClr val="tx1"/>
+                </a:solidFill>
+                <a:latin typeface="+mn-lt"/>
+                <a:ea typeface="+mn-ea"/>
+                <a:cs typeface="+mn-cs"/>
+              </a:defRPr>
+            </a:lvl4pPr>
+            <a:lvl5pPr marL="2057400" indent="-228600" algn="l" defTabSz="914400" rtl="0" eaLnBrk="1" latinLnBrk="0" hangingPunct="1">
+              <a:spcBef>
+                <a:spcPct val="20000"/>
+              </a:spcBef>
+              <a:buFont typeface="Arial" pitchFamily="34" charset="0"/>
+              <a:buChar char="»"/>
+              <a:defRPr sz="2000" kern="1200">
+                <a:solidFill>
+                  <a:schemeClr val="tx1"/>
+                </a:solidFill>
+                <a:latin typeface="+mn-lt"/>
+                <a:ea typeface="+mn-ea"/>
+                <a:cs typeface="+mn-cs"/>
+              </a:defRPr>
+            </a:lvl5pPr>
+            <a:lvl6pPr marL="2514600" indent="-228600" algn="l" defTabSz="914400" rtl="0" eaLnBrk="1" latinLnBrk="0" hangingPunct="1">
+              <a:spcBef>
+                <a:spcPct val="20000"/>
+              </a:spcBef>
+              <a:buFont typeface="Arial" pitchFamily="34" charset="0"/>
+              <a:buChar char="•"/>
+              <a:defRPr sz="2000" kern="1200">
+                <a:solidFill>
+                  <a:schemeClr val="tx1"/>
+                </a:solidFill>
+                <a:latin typeface="+mn-lt"/>
+                <a:ea typeface="+mn-ea"/>
+                <a:cs typeface="+mn-cs"/>
+              </a:defRPr>
+            </a:lvl6pPr>
+            <a:lvl7pPr marL="2971800" indent="-228600" algn="l" defTabSz="914400" rtl="0" eaLnBrk="1" latinLnBrk="0" hangingPunct="1">
+              <a:spcBef>
+                <a:spcPct val="20000"/>
+              </a:spcBef>
+              <a:buFont typeface="Arial" pitchFamily="34" charset="0"/>
+              <a:buChar char="•"/>
+              <a:defRPr sz="2000" kern="1200">
+                <a:solidFill>
+                  <a:schemeClr val="tx1"/>
+                </a:solidFill>
+                <a:latin typeface="+mn-lt"/>
+                <a:ea typeface="+mn-ea"/>
+                <a:cs typeface="+mn-cs"/>
+              </a:defRPr>
+            </a:lvl7pPr>
+            <a:lvl8pPr marL="3429000" indent="-228600" algn="l" defTabSz="914400" rtl="0" eaLnBrk="1" latinLnBrk="0" hangingPunct="1">
+              <a:spcBef>
+                <a:spcPct val="20000"/>
+              </a:spcBef>
+              <a:buFont typeface="Arial" pitchFamily="34" charset="0"/>
+              <a:buChar char="•"/>
+              <a:defRPr sz="2000" kern="1200">
+                <a:solidFill>
+                  <a:schemeClr val="tx1"/>
+                </a:solidFill>
+                <a:latin typeface="+mn-lt"/>
+                <a:ea typeface="+mn-ea"/>
+                <a:cs typeface="+mn-cs"/>
+              </a:defRPr>
+            </a:lvl8pPr>
+            <a:lvl9pPr marL="3886200" indent="-228600" algn="l" defTabSz="914400" rtl="0" eaLnBrk="1" latinLnBrk="0" hangingPunct="1">
+              <a:spcBef>
+                <a:spcPct val="20000"/>
+              </a:spcBef>
+              <a:buFont typeface="Arial" pitchFamily="34" charset="0"/>
+              <a:buChar char="•"/>
+              <a:defRPr sz="2000" kern="1200">
+                <a:solidFill>
+                  <a:schemeClr val="tx1"/>
+                </a:solidFill>
+                <a:latin typeface="+mn-lt"/>
+                <a:ea typeface="+mn-ea"/>
+                <a:cs typeface="+mn-cs"/>
+              </a:defRPr>
+            </a:lvl9pPr>
+          </a:lstStyle>
+          <a:p>
+            <a:r>
+              <a:rPr lang="ru-RU" sz="3600" dirty="0">
+                <a:solidFill>
+                  <a:schemeClr val="tx2"/>
+                </a:solidFill>
+                <a:latin typeface="Times New Roman" panose="02020603050405020304" pitchFamily="18" charset="0"/>
+                <a:cs typeface="Times New Roman" panose="02020603050405020304" pitchFamily="18" charset="0"/>
+              </a:rPr>
+              <a:t>Проведены эксперименты: замеры времени построения дерева и поиска, сравнение с линейным поиском.</a:t>
+            </a:r>
+          </a:p>
+        </p:txBody>
+      </p:sp>
+      <p:sp>
+        <p:nvSpPr>
+          <p:cNvPr id="25" name="TextBox 24">
+            <a:extLst>
+              <a:ext uri="{FF2B5EF4-FFF2-40B4-BE49-F238E27FC236}">
+                <a16:creationId xmlns:a16="http://schemas.microsoft.com/office/drawing/2014/main" id="{87087095-B43A-FE23-7E4D-995627B03D3E}"/>
+              </a:ext>
+            </a:extLst>
+          </p:cNvPr>
+          <p:cNvSpPr txBox="1"/>
+          <p:nvPr/>
+        </p:nvSpPr>
+        <p:spPr>
+          <a:xfrm>
+            <a:off x="5524500" y="5913288"/>
+            <a:ext cx="7086600" cy="1754326"/>
+          </a:xfrm>
+          <a:prstGeom prst="rect">
+            <a:avLst/>
+          </a:prstGeom>
+          <a:noFill/>
+        </p:spPr>
+        <p:txBody>
+          <a:bodyPr wrap="square">
+            <a:spAutoFit/>
+          </a:bodyPr>
+          <a:lstStyle/>
+          <a:p>
+            <a:pPr marL="571500" indent="-571500">
+              <a:buFont typeface="Arial" panose="020B0604020202020204" pitchFamily="34" charset="0"/>
+              <a:buChar char="•"/>
+            </a:pPr>
+            <a:r>
+              <a:rPr lang="ru-RU" sz="3600" dirty="0">
+                <a:solidFill>
+                  <a:schemeClr val="tx2"/>
+                </a:solidFill>
+              </a:rPr>
+              <a:t>Код структурирован по слоям, покрыт тестами, готов к демонстрации и доработке.</a:t>
+            </a:r>
+          </a:p>
+        </p:txBody>
+      </p:sp>
+    </p:spTree>
+    <p:extLst>
+      <p:ext uri="{BB962C8B-B14F-4D97-AF65-F5344CB8AC3E}">
+        <p14:creationId xmlns:p14="http://schemas.microsoft.com/office/powerpoint/2010/main" val="3669536074"/>
+      </p:ext>
+    </p:extLst>
+  </p:cSld>
+  <p:clrMapOvr>
+    <a:masterClrMapping/>
+  </p:clrMapOvr>
+</p:sld>
+</file>
+
+<file path=ppt/slides/slide19.xml><?xml version="1.0" encoding="utf-8"?>
+<p:sld xmlns:a="http://schemas.openxmlformats.org/drawingml/2006/main" xmlns:r="http://schemas.openxmlformats.org/officeDocument/2006/relationships" xmlns:p="http://schemas.openxmlformats.org/presentationml/2006/main">
+  <p:cSld>
+    <p:spTree>
+      <p:nvGrpSpPr>
+        <p:cNvPr id="1" name="">
+          <a:extLst>
+            <a:ext uri="{FF2B5EF4-FFF2-40B4-BE49-F238E27FC236}">
+              <a16:creationId xmlns:a16="http://schemas.microsoft.com/office/drawing/2014/main" id="{F10B1B78-2255-1F59-0790-13B51CB2A7DD}"/>
+            </a:ext>
+          </a:extLst>
+        </p:cNvPr>
+        <p:cNvGrpSpPr/>
+        <p:nvPr/>
+      </p:nvGrpSpPr>
+      <p:grpSpPr>
+        <a:xfrm>
+          <a:off x="0" y="0"/>
+          <a:ext cx="0" cy="0"/>
+          <a:chOff x="0" y="0"/>
+          <a:chExt cx="0" cy="0"/>
+        </a:xfrm>
+      </p:grpSpPr>
+      <p:grpSp>
+        <p:nvGrpSpPr>
+          <p:cNvPr id="2" name="Group 2">
+            <a:extLst>
+              <a:ext uri="{FF2B5EF4-FFF2-40B4-BE49-F238E27FC236}">
+                <a16:creationId xmlns:a16="http://schemas.microsoft.com/office/drawing/2014/main" id="{2AD5625E-65DA-2C08-DC4D-439AF53A01AC}"/>
+              </a:ext>
+            </a:extLst>
+          </p:cNvPr>
+          <p:cNvGrpSpPr/>
+          <p:nvPr/>
+        </p:nvGrpSpPr>
+        <p:grpSpPr>
+          <a:xfrm>
+            <a:off x="0" y="0"/>
+            <a:ext cx="18288000" cy="10287000"/>
+            <a:chOff x="0" y="0"/>
+            <a:chExt cx="24384000" cy="13716000"/>
+          </a:xfrm>
+        </p:grpSpPr>
+        <p:sp>
+          <p:nvSpPr>
+            <p:cNvPr id="3" name="Freeform 3">
+              <a:extLst>
+                <a:ext uri="{FF2B5EF4-FFF2-40B4-BE49-F238E27FC236}">
+                  <a16:creationId xmlns:a16="http://schemas.microsoft.com/office/drawing/2014/main" id="{EE774FA1-3194-75D8-9596-07AA418A41EE}"/>
+                </a:ext>
+              </a:extLst>
+            </p:cNvPr>
+            <p:cNvSpPr/>
+            <p:nvPr/>
+          </p:nvSpPr>
+          <p:spPr>
+            <a:xfrm>
+              <a:off x="0" y="0"/>
+              <a:ext cx="24384000" cy="13716000"/>
+            </a:xfrm>
+            <a:custGeom>
+              <a:avLst/>
+              <a:gdLst/>
+              <a:ahLst/>
+              <a:cxnLst/>
+              <a:rect l="l" t="t" r="r" b="b"/>
+              <a:pathLst>
+                <a:path w="24384000" h="13716000">
+                  <a:moveTo>
+                    <a:pt x="0" y="0"/>
+                  </a:moveTo>
+                  <a:lnTo>
+                    <a:pt x="24384000" y="0"/>
+                  </a:lnTo>
+                  <a:lnTo>
+                    <a:pt x="24384000" y="13716000"/>
+                  </a:lnTo>
+                  <a:lnTo>
+                    <a:pt x="0" y="13716000"/>
+                  </a:lnTo>
+                  <a:close/>
+                </a:path>
+              </a:pathLst>
+            </a:custGeom>
+            <a:solidFill>
+              <a:srgbClr val="DEEEFF"/>
+            </a:solidFill>
+          </p:spPr>
+        </p:sp>
+      </p:grpSp>
+      <p:grpSp>
+        <p:nvGrpSpPr>
+          <p:cNvPr id="4" name="Group 4">
+            <a:extLst>
+              <a:ext uri="{FF2B5EF4-FFF2-40B4-BE49-F238E27FC236}">
+                <a16:creationId xmlns:a16="http://schemas.microsoft.com/office/drawing/2014/main" id="{A475F7BC-CA12-1B8A-F3F4-D6F167804686}"/>
+              </a:ext>
+            </a:extLst>
+          </p:cNvPr>
+          <p:cNvGrpSpPr/>
+          <p:nvPr/>
+        </p:nvGrpSpPr>
+        <p:grpSpPr>
+          <a:xfrm>
+            <a:off x="22538" y="0"/>
+            <a:ext cx="18288000" cy="10287000"/>
+            <a:chOff x="0" y="0"/>
+            <a:chExt cx="24384000" cy="13716000"/>
+          </a:xfrm>
+        </p:grpSpPr>
+        <p:sp>
+          <p:nvSpPr>
+            <p:cNvPr id="5" name="Freeform 5">
+              <a:extLst>
+                <a:ext uri="{FF2B5EF4-FFF2-40B4-BE49-F238E27FC236}">
+                  <a16:creationId xmlns:a16="http://schemas.microsoft.com/office/drawing/2014/main" id="{0E51389A-B99A-927B-3650-3A64426B0AFE}"/>
+                </a:ext>
+              </a:extLst>
+            </p:cNvPr>
+            <p:cNvSpPr/>
+            <p:nvPr/>
+          </p:nvSpPr>
+          <p:spPr>
+            <a:xfrm>
+              <a:off x="0" y="0"/>
+              <a:ext cx="24384000" cy="13716000"/>
+            </a:xfrm>
+            <a:custGeom>
+              <a:avLst/>
+              <a:gdLst/>
+              <a:ahLst/>
+              <a:cxnLst/>
+              <a:rect l="l" t="t" r="r" b="b"/>
+              <a:pathLst>
+                <a:path w="24384000" h="13716000">
+                  <a:moveTo>
+                    <a:pt x="0" y="0"/>
+                  </a:moveTo>
+                  <a:lnTo>
+                    <a:pt x="24384000" y="0"/>
+                  </a:lnTo>
+                  <a:lnTo>
+                    <a:pt x="24384000" y="13716000"/>
+                  </a:lnTo>
+                  <a:lnTo>
+                    <a:pt x="0" y="13716000"/>
+                  </a:lnTo>
+                  <a:close/>
+                </a:path>
+              </a:pathLst>
+            </a:custGeom>
+            <a:solidFill>
+              <a:srgbClr val="FFFFFF"/>
+            </a:solidFill>
+          </p:spPr>
+          <p:txBody>
+            <a:bodyPr/>
+            <a:lstStyle/>
+            <a:p>
+              <a:endParaRPr lang="ru-RU" dirty="0"/>
+            </a:p>
+          </p:txBody>
+        </p:sp>
+      </p:grpSp>
+      <p:sp>
+        <p:nvSpPr>
+          <p:cNvPr id="6" name="TextBox 6">
+            <a:extLst>
+              <a:ext uri="{FF2B5EF4-FFF2-40B4-BE49-F238E27FC236}">
+                <a16:creationId xmlns:a16="http://schemas.microsoft.com/office/drawing/2014/main" id="{BD56CAC0-7605-E506-903C-B3BE22B25F9C}"/>
+              </a:ext>
+            </a:extLst>
+          </p:cNvPr>
+          <p:cNvSpPr txBox="1"/>
+          <p:nvPr/>
+        </p:nvSpPr>
+        <p:spPr>
+          <a:xfrm>
+            <a:off x="991419" y="1161930"/>
+            <a:ext cx="16305162" cy="827150"/>
+          </a:xfrm>
+          <a:prstGeom prst="rect">
+            <a:avLst/>
+          </a:prstGeom>
+        </p:spPr>
+        <p:txBody>
+          <a:bodyPr wrap="square" lIns="0" tIns="0" rIns="0" bIns="0" rtlCol="0" anchor="t">
+            <a:spAutoFit/>
+          </a:bodyPr>
+          <a:lstStyle/>
+          <a:p>
+            <a:pPr algn="ctr">
+              <a:lnSpc>
+                <a:spcPts val="5562"/>
+              </a:lnSpc>
+            </a:pPr>
+            <a:r>
+              <a:rPr lang="ru-RU" sz="9600" dirty="0">
+                <a:solidFill>
+                  <a:srgbClr val="091C53"/>
+                </a:solidFill>
+                <a:latin typeface="Times New Roman"/>
+                <a:ea typeface="Times New Roman"/>
+                <a:cs typeface="Times New Roman"/>
+                <a:sym typeface="Times New Roman"/>
+              </a:rPr>
+              <a:t>Спасибо за внимание</a:t>
+            </a:r>
+            <a:endParaRPr lang="en-US" sz="9600" dirty="0">
+              <a:solidFill>
+                <a:srgbClr val="091C53"/>
+              </a:solidFill>
+              <a:latin typeface="Times New Roman"/>
+              <a:ea typeface="Times New Roman"/>
+              <a:cs typeface="Times New Roman"/>
+              <a:sym typeface="Times New Roman"/>
+            </a:endParaRPr>
+          </a:p>
+        </p:txBody>
+      </p:sp>
+      <p:pic>
+        <p:nvPicPr>
+          <p:cNvPr id="24" name="Рисунок 23">
+            <a:extLst>
+              <a:ext uri="{FF2B5EF4-FFF2-40B4-BE49-F238E27FC236}">
+                <a16:creationId xmlns:a16="http://schemas.microsoft.com/office/drawing/2014/main" id="{D156544D-9956-F61E-A843-2BB09E146350}"/>
+              </a:ext>
+            </a:extLst>
+          </p:cNvPr>
+          <p:cNvPicPr>
+            <a:picLocks noChangeAspect="1"/>
+          </p:cNvPicPr>
+          <p:nvPr/>
+        </p:nvPicPr>
+        <p:blipFill>
+          <a:blip r:embed="rId3">
+            <a:extLst>
+              <a:ext uri="{28A0092B-C50C-407E-A947-70E740481C1C}">
+                <a14:useLocalDpi xmlns:a14="http://schemas.microsoft.com/office/drawing/2010/main" val="0"/>
+              </a:ext>
+            </a:extLst>
+          </a:blip>
+          <a:stretch>
+            <a:fillRect/>
+          </a:stretch>
+        </p:blipFill>
+        <p:spPr>
+          <a:xfrm>
+            <a:off x="5810250" y="2444155"/>
+            <a:ext cx="6667500" cy="6667500"/>
+          </a:xfrm>
+          <a:prstGeom prst="rect">
+            <a:avLst/>
+          </a:prstGeom>
+        </p:spPr>
+      </p:pic>
+    </p:spTree>
+    <p:extLst>
+      <p:ext uri="{BB962C8B-B14F-4D97-AF65-F5344CB8AC3E}">
+        <p14:creationId xmlns:p14="http://schemas.microsoft.com/office/powerpoint/2010/main" val="2649089689"/>
+      </p:ext>
+    </p:extLst>
   </p:cSld>
   <p:clrMapOvr>
     <a:masterClrMapping/>
